--- a/有你蒸好_決賽簡報_網頁版.pptx
+++ b/有你蒸好_決賽簡報_網頁版.pptx
@@ -21,6 +21,7 @@
     <p:sldId id="269" r:id="rId20"/>
     <p:sldId id="270" r:id="rId21"/>
     <p:sldId id="271" r:id="rId22"/>
+    <p:sldId id="272" r:id="rId23"/>
   </p:sldIdLst>
   <p:sldSz cx="12191695" cy="6858000" type="screen4x3"/>
   <p:notesSz cx="6858000" cy="9144000"/>
@@ -3504,7 +3505,7 @@
                 <a:ea typeface="Microsoft JhengHei"/>
                 <a:cs typeface="Microsoft JhengHei"/>
               </a:rPr>
-              <a:t>DEMO ② · Demo 30%</a:t>
+              <a:t>DEMO ① · 介面呈現 15% / Demo 30%</a:t>
             </a:r>
           </a:p>
         </p:txBody>
@@ -3551,7 +3552,7 @@
                 <a:ea typeface="Microsoft JhengHei"/>
                 <a:cs typeface="Microsoft JhengHei"/>
               </a:rPr>
-              <a:t>跨機構比較</a:t>
+              <a:t>分析儀表板</a:t>
             </a:r>
           </a:p>
         </p:txBody>
@@ -3606,7 +3607,7 @@
                 <a:ea typeface="Microsoft JhengHei"/>
                 <a:cs typeface="Microsoft JhengHei"/>
               </a:rPr>
-              <a:t>億元對齊　</a:t>
+              <a:t>核心指標卡　</a:t>
             </a:r>
             <a:r>
               <a:rPr sz="1550">
@@ -3617,7 +3618,7 @@
                 <a:ea typeface="Microsoft JhengHei"/>
                 <a:cs typeface="Microsoft JhengHei"/>
               </a:rPr>
-              <a:t>絕對金額自動換算成億元，並排才有意義</a:t>
+              <a:t>金控門面數字加大加粗，投影機也看得清</a:t>
             </a:r>
           </a:p>
           <a:p>
@@ -3649,7 +3650,7 @@
                 <a:ea typeface="Microsoft JhengHei"/>
                 <a:cs typeface="Microsoft JhengHei"/>
               </a:rPr>
-              <a:t>標準比率對照　</a:t>
+              <a:t>依財務意義分組　</a:t>
             </a:r>
             <a:r>
               <a:rPr sz="1550">
@@ -3660,7 +3661,7 @@
                 <a:ea typeface="Microsoft JhengHei"/>
                 <a:cs typeface="Microsoft JhengHei"/>
               </a:rPr>
-              <a:t>名稱不同也配得起來（ROE／ROA／NIM…）</a:t>
+              <a:t>獲利／資本／資產品質…照邏輯瀏覽</a:t>
             </a:r>
           </a:p>
           <a:p>
@@ -3692,7 +3693,7 @@
                 <a:ea typeface="Microsoft JhengHei"/>
                 <a:cs typeface="Microsoft JhengHei"/>
               </a:rPr>
-              <a:t>雙序列圖　</a:t>
+              <a:t>懸停看趨勢　</a:t>
             </a:r>
             <a:r>
               <a:rPr sz="1550">
@@ -3703,7 +3704,7 @@
                 <a:ea typeface="Microsoft JhengHei"/>
                 <a:cs typeface="Microsoft JhengHei"/>
               </a:rPr>
-              <a:t>長條＋成長率折線，一眼看出高下與動能</a:t>
+              <a:t>滑過卡片顯示六期 sparkline 走勢</a:t>
             </a:r>
           </a:p>
           <a:p>
@@ -3735,7 +3736,7 @@
                 <a:ea typeface="Microsoft JhengHei"/>
                 <a:cs typeface="Microsoft JhengHei"/>
               </a:rPr>
-              <a:t>誠實揭露　</a:t>
+              <a:t>AI 觀點總結　</a:t>
             </a:r>
             <a:r>
               <a:rPr sz="1550">
@@ -3746,7 +3747,7 @@
                 <a:ea typeface="Microsoft JhengHei"/>
                 <a:cs typeface="Microsoft JhengHei"/>
               </a:rPr>
-              <a:t>點「對齊」看實際對應欄位，非黑箱</a:t>
+              <a:t>一鍵讓 AI 讀完本期數字給一句話結論</a:t>
             </a:r>
           </a:p>
           <a:p>
@@ -3778,7 +3779,7 @@
                 <a:ea typeface="Microsoft JhengHei"/>
                 <a:cs typeface="Microsoft JhengHei"/>
               </a:rPr>
-              <a:t>缺漏單位推定　</a:t>
+              <a:t>術語 tooltip　</a:t>
             </a:r>
             <a:r>
               <a:rPr sz="1550">
@@ -3789,7 +3790,7 @@
                 <a:ea typeface="Microsoft JhengHei"/>
                 <a:cs typeface="Microsoft JhengHei"/>
               </a:rPr>
-              <a:t>某期漏標單位，用其他期間補回並標註</a:t>
+              <a:t>ROE／NIM 滑上去看白話定義</a:t>
             </a:r>
           </a:p>
         </p:txBody>
@@ -4107,7 +4108,7 @@
                 <a:ea typeface="Microsoft JhengHei"/>
                 <a:cs typeface="Microsoft JhengHei"/>
               </a:rPr>
-              <a:t>跨機構比較</a:t>
+              <a:t>分析儀表板</a:t>
             </a:r>
           </a:p>
           <a:p>
@@ -4251,7 +4252,7 @@
                 <a:ea typeface="Microsoft JhengHei"/>
                 <a:cs typeface="Microsoft JhengHei"/>
               </a:rPr>
-              <a:t>DEMO ③ · Demo 30%</a:t>
+              <a:t>DEMO ② · Demo 30%</a:t>
             </a:r>
           </a:p>
         </p:txBody>
@@ -4298,7 +4299,7 @@
                 <a:ea typeface="Microsoft JhengHei"/>
                 <a:cs typeface="Microsoft JhengHei"/>
               </a:rPr>
-              <a:t>問答與報告</a:t>
+              <a:t>跨機構比較</a:t>
             </a:r>
           </a:p>
         </p:txBody>
@@ -4353,7 +4354,7 @@
                 <a:ea typeface="Microsoft JhengHei"/>
                 <a:cs typeface="Microsoft JhengHei"/>
               </a:rPr>
-              <a:t>Hybrid RAG 對話　</a:t>
+              <a:t>億元對齊　</a:t>
             </a:r>
             <a:r>
               <a:rPr sz="1550">
@@ -4364,7 +4365,7 @@
                 <a:ea typeface="Microsoft JhengHei"/>
                 <a:cs typeface="Microsoft JhengHei"/>
               </a:rPr>
-              <a:t>三種路由徽章，看得出走哪條引擎</a:t>
+              <a:t>絕對金額自動換算成億元，並排才有意義</a:t>
             </a:r>
           </a:p>
           <a:p>
@@ -4396,7 +4397,7 @@
                 <a:ea typeface="Microsoft JhengHei"/>
                 <a:cs typeface="Microsoft JhengHei"/>
               </a:rPr>
-              <a:t>答案附圖　</a:t>
+              <a:t>標準比率對照　</a:t>
             </a:r>
             <a:r>
               <a:rPr sz="1550">
@@ -4407,7 +4408,7 @@
                 <a:ea typeface="Microsoft JhengHei"/>
                 <a:cs typeface="Microsoft JhengHei"/>
               </a:rPr>
-              <a:t>牽涉指標時自動畫出歷史趨勢圖</a:t>
+              <a:t>名稱不同也配得起來（ROE／ROA／NIM…）</a:t>
             </a:r>
           </a:p>
           <a:p>
@@ -4439,7 +4440,7 @@
                 <a:ea typeface="Microsoft JhengHei"/>
                 <a:cs typeface="Microsoft JhengHei"/>
               </a:rPr>
-              <a:t>EAP 開關　</a:t>
+              <a:t>雙序列圖　</a:t>
             </a:r>
             <a:r>
               <a:rPr sz="1550">
@@ -4450,7 +4451,7 @@
                 <a:ea typeface="Microsoft JhengHei"/>
                 <a:cs typeface="Microsoft JhengHei"/>
               </a:rPr>
-              <a:t>一鍵切換 EAP 平台回答</a:t>
+              <a:t>長條＋成長率折線，一眼看出高下與動能</a:t>
             </a:r>
           </a:p>
           <a:p>
@@ -4482,7 +4483,7 @@
                 <a:ea typeface="Microsoft JhengHei"/>
                 <a:cs typeface="Microsoft JhengHei"/>
               </a:rPr>
-              <a:t>自動辨識　</a:t>
+              <a:t>誠實揭露　</a:t>
             </a:r>
             <a:r>
               <a:rPr sz="1550">
@@ -4493,7 +4494,7 @@
                 <a:ea typeface="Microsoft JhengHei"/>
                 <a:cs typeface="Microsoft JhengHei"/>
               </a:rPr>
-              <a:t>公司／期間直接打在問題裡即可</a:t>
+              <a:t>點「對齊」看實際對應欄位，非黑箱</a:t>
             </a:r>
           </a:p>
           <a:p>
@@ -4525,7 +4526,7 @@
                 <a:ea typeface="Microsoft JhengHei"/>
                 <a:cs typeface="Microsoft JhengHei"/>
               </a:rPr>
-              <a:t>一鍵匯出 Word　</a:t>
+              <a:t>缺漏單位推定　</a:t>
             </a:r>
             <a:r>
               <a:rPr sz="1550">
@@ -4536,7 +4537,7 @@
                 <a:ea typeface="Microsoft JhengHei"/>
                 <a:cs typeface="Microsoft JhengHei"/>
               </a:rPr>
-              <a:t>真表格＋嵌入圖表的財務分析報告</a:t>
+              <a:t>某期漏標單位，用其他期間補回並標註</a:t>
             </a:r>
           </a:p>
         </p:txBody>
@@ -4854,7 +4855,7 @@
                 <a:ea typeface="Microsoft JhengHei"/>
                 <a:cs typeface="Microsoft JhengHei"/>
               </a:rPr>
-              <a:t>問答與報告</a:t>
+              <a:t>跨機構比較</a:t>
             </a:r>
           </a:p>
           <a:p>
@@ -4998,7 +4999,7 @@
                 <a:ea typeface="Microsoft JhengHei"/>
                 <a:cs typeface="Microsoft JhengHei"/>
               </a:rPr>
-              <a:t>DEMO ④ · Demo 30%</a:t>
+              <a:t>DEMO ③ · Demo 30%</a:t>
             </a:r>
           </a:p>
         </p:txBody>
@@ -5045,7 +5046,7 @@
                 <a:ea typeface="Microsoft JhengHei"/>
                 <a:cs typeface="Microsoft JhengHei"/>
               </a:rPr>
-              <a:t>資料來源總覽 ＋ 上傳</a:t>
+              <a:t>問答與報告</a:t>
             </a:r>
           </a:p>
         </p:txBody>
@@ -5100,7 +5101,7 @@
                 <a:ea typeface="Microsoft JhengHei"/>
                 <a:cs typeface="Microsoft JhengHei"/>
               </a:rPr>
-              <a:t>收錄概況　</a:t>
+              <a:t>Hybrid RAG 對話　</a:t>
             </a:r>
             <a:r>
               <a:rPr sz="1550">
@@ -5111,7 +5112,7 @@
                 <a:ea typeface="Microsoft JhengHei"/>
                 <a:cs typeface="Microsoft JhengHei"/>
               </a:rPr>
-              <a:t>公司數／期間／指標／語意段落一目了然</a:t>
+              <a:t>三種路由徽章，看得出走哪條引擎</a:t>
             </a:r>
           </a:p>
           <a:p>
@@ -5143,7 +5144,7 @@
                 <a:ea typeface="Microsoft JhengHei"/>
                 <a:cs typeface="Microsoft JhengHei"/>
               </a:rPr>
-              <a:t>收錄明細　</a:t>
+              <a:t>答案附圖　</a:t>
             </a:r>
             <a:r>
               <a:rPr sz="1550">
@@ -5154,7 +5155,7 @@
                 <a:ea typeface="Microsoft JhengHei"/>
                 <a:cs typeface="Microsoft JhengHei"/>
               </a:rPr>
-              <a:t>各公司各期的指標量與語意段落數</a:t>
+              <a:t>牽涉指標時自動畫出歷史趨勢圖</a:t>
             </a:r>
           </a:p>
           <a:p>
@@ -5186,7 +5187,7 @@
                 <a:ea typeface="Microsoft JhengHei"/>
                 <a:cs typeface="Microsoft JhengHei"/>
               </a:rPr>
-              <a:t>逐字稿檢視　</a:t>
+              <a:t>EAP 開關　</a:t>
             </a:r>
             <a:r>
               <a:rPr sz="1550">
@@ -5197,7 +5198,7 @@
                 <a:ea typeface="Microsoft JhengHei"/>
                 <a:cs typeface="Microsoft JhengHei"/>
               </a:rPr>
-              <a:t>法說會錄音轉出的逐字稿可直接讀</a:t>
+              <a:t>一鍵切換 EAP 平台回答</a:t>
             </a:r>
           </a:p>
           <a:p>
@@ -5229,7 +5230,7 @@
                 <a:ea typeface="Microsoft JhengHei"/>
                 <a:cs typeface="Microsoft JhengHei"/>
               </a:rPr>
-              <a:t>上傳新資料　</a:t>
+              <a:t>自動辨識　</a:t>
             </a:r>
             <a:r>
               <a:rPr sz="1550">
@@ -5240,7 +5241,7 @@
                 <a:ea typeface="Microsoft JhengHei"/>
                 <a:cs typeface="Microsoft JhengHei"/>
               </a:rPr>
-              <a:t>PDF→VLM／錄音→STT，背景解析＋進度條</a:t>
+              <a:t>公司／期間直接打在問題裡即可</a:t>
             </a:r>
           </a:p>
           <a:p>
@@ -5272,7 +5273,7 @@
                 <a:ea typeface="Microsoft JhengHei"/>
                 <a:cs typeface="Microsoft JhengHei"/>
               </a:rPr>
-              <a:t>即時擴充　</a:t>
+              <a:t>一鍵匯出 Word　</a:t>
             </a:r>
             <a:r>
               <a:rPr sz="1550">
@@ -5283,7 +5284,7 @@
                 <a:ea typeface="Microsoft JhengHei"/>
                 <a:cs typeface="Microsoft JhengHei"/>
               </a:rPr>
-              <a:t>上傳完自動更新，其他頁馬上看得到</a:t>
+              <a:t>真表格＋嵌入圖表的財務分析報告</a:t>
             </a:r>
           </a:p>
         </p:txBody>
@@ -5601,7 +5602,7 @@
                 <a:ea typeface="Microsoft JhengHei"/>
                 <a:cs typeface="Microsoft JhengHei"/>
               </a:rPr>
-              <a:t>資料來源總覽 ＋ 上傳新資料</a:t>
+              <a:t>問答與報告</a:t>
             </a:r>
           </a:p>
           <a:p>
@@ -5745,6 +5746,753 @@
                 <a:ea typeface="Microsoft JhengHei"/>
                 <a:cs typeface="Microsoft JhengHei"/>
               </a:rPr>
+              <a:t>DEMO ④ · Demo 30%</a:t>
+            </a:r>
+          </a:p>
+        </p:txBody>
+      </p:sp>
+      <p:sp>
+        <p:nvSpPr>
+          <p:cNvPr id="3" name="TextBox 2"/>
+          <p:cNvSpPr txBox="1"/>
+          <p:nvPr/>
+        </p:nvSpPr>
+        <p:spPr>
+          <a:xfrm>
+            <a:off x="640080" y="822960"/>
+            <a:ext cx="10972800" cy="822960"/>
+          </a:xfrm>
+          <a:prstGeom prst="rect">
+            <a:avLst/>
+          </a:prstGeom>
+          <a:noFill/>
+        </p:spPr>
+        <p:txBody>
+          <a:bodyPr wrap="square" anchor="t" lIns="0" rIns="0" tIns="0" bIns="0">
+            <a:spAutoFit/>
+          </a:bodyPr>
+          <a:lstStyle/>
+          <a:p>
+            <a:pPr algn="l">
+              <a:lnSpc>
+                <a:spcPct val="100000"/>
+              </a:lnSpc>
+              <a:spcBef>
+                <a:spcPts val="0"/>
+              </a:spcBef>
+              <a:spcAft>
+                <a:spcPts val="400"/>
+              </a:spcAft>
+            </a:pPr>
+            <a:r>
+              <a:rPr sz="3200" b="1">
+                <a:solidFill>
+                  <a:srgbClr val="1E3A5F"/>
+                </a:solidFill>
+                <a:latin typeface="Microsoft JhengHei"/>
+                <a:ea typeface="Microsoft JhengHei"/>
+                <a:cs typeface="Microsoft JhengHei"/>
+              </a:rPr>
+              <a:t>資料來源總覽 ＋ 上傳</a:t>
+            </a:r>
+          </a:p>
+        </p:txBody>
+      </p:sp>
+      <p:sp>
+        <p:nvSpPr>
+          <p:cNvPr id="4" name="TextBox 3"/>
+          <p:cNvSpPr txBox="1"/>
+          <p:nvPr/>
+        </p:nvSpPr>
+        <p:spPr>
+          <a:xfrm>
+            <a:off x="640080" y="2148840"/>
+            <a:ext cx="5029200" cy="3657600"/>
+          </a:xfrm>
+          <a:prstGeom prst="rect">
+            <a:avLst/>
+          </a:prstGeom>
+          <a:noFill/>
+        </p:spPr>
+        <p:txBody>
+          <a:bodyPr wrap="square" lIns="0" rIns="0" tIns="0" bIns="0">
+            <a:spAutoFit/>
+          </a:bodyPr>
+          <a:lstStyle/>
+          <a:p>
+            <a:pPr>
+              <a:lnSpc>
+                <a:spcPct val="115000"/>
+              </a:lnSpc>
+              <a:spcAft>
+                <a:spcPts val="1400"/>
+              </a:spcAft>
+            </a:pPr>
+            <a:r>
+              <a:rPr sz="1350" b="1">
+                <a:solidFill>
+                  <a:srgbClr val="6B4E9E"/>
+                </a:solidFill>
+                <a:latin typeface="Microsoft JhengHei"/>
+                <a:ea typeface="Microsoft JhengHei"/>
+                <a:cs typeface="Microsoft JhengHei"/>
+              </a:rPr>
+              <a:t>●  </a:t>
+            </a:r>
+            <a:r>
+              <a:rPr sz="1550" b="1">
+                <a:solidFill>
+                  <a:srgbClr val="1E3A5F"/>
+                </a:solidFill>
+                <a:latin typeface="Microsoft JhengHei"/>
+                <a:ea typeface="Microsoft JhengHei"/>
+                <a:cs typeface="Microsoft JhengHei"/>
+              </a:rPr>
+              <a:t>收錄概況　</a:t>
+            </a:r>
+            <a:r>
+              <a:rPr sz="1550">
+                <a:solidFill>
+                  <a:srgbClr val="434343"/>
+                </a:solidFill>
+                <a:latin typeface="Microsoft JhengHei"/>
+                <a:ea typeface="Microsoft JhengHei"/>
+                <a:cs typeface="Microsoft JhengHei"/>
+              </a:rPr>
+              <a:t>公司數／期間／指標／語意段落一目了然</a:t>
+            </a:r>
+          </a:p>
+          <a:p>
+            <a:pPr>
+              <a:lnSpc>
+                <a:spcPct val="115000"/>
+              </a:lnSpc>
+              <a:spcAft>
+                <a:spcPts val="1400"/>
+              </a:spcAft>
+            </a:pPr>
+            <a:r>
+              <a:rPr sz="1350" b="1">
+                <a:solidFill>
+                  <a:srgbClr val="6B4E9E"/>
+                </a:solidFill>
+                <a:latin typeface="Microsoft JhengHei"/>
+                <a:ea typeface="Microsoft JhengHei"/>
+                <a:cs typeface="Microsoft JhengHei"/>
+              </a:rPr>
+              <a:t>●  </a:t>
+            </a:r>
+            <a:r>
+              <a:rPr sz="1550" b="1">
+                <a:solidFill>
+                  <a:srgbClr val="1E3A5F"/>
+                </a:solidFill>
+                <a:latin typeface="Microsoft JhengHei"/>
+                <a:ea typeface="Microsoft JhengHei"/>
+                <a:cs typeface="Microsoft JhengHei"/>
+              </a:rPr>
+              <a:t>收錄明細　</a:t>
+            </a:r>
+            <a:r>
+              <a:rPr sz="1550">
+                <a:solidFill>
+                  <a:srgbClr val="434343"/>
+                </a:solidFill>
+                <a:latin typeface="Microsoft JhengHei"/>
+                <a:ea typeface="Microsoft JhengHei"/>
+                <a:cs typeface="Microsoft JhengHei"/>
+              </a:rPr>
+              <a:t>各公司各期的指標量與語意段落數</a:t>
+            </a:r>
+          </a:p>
+          <a:p>
+            <a:pPr>
+              <a:lnSpc>
+                <a:spcPct val="115000"/>
+              </a:lnSpc>
+              <a:spcAft>
+                <a:spcPts val="1400"/>
+              </a:spcAft>
+            </a:pPr>
+            <a:r>
+              <a:rPr sz="1350" b="1">
+                <a:solidFill>
+                  <a:srgbClr val="6B4E9E"/>
+                </a:solidFill>
+                <a:latin typeface="Microsoft JhengHei"/>
+                <a:ea typeface="Microsoft JhengHei"/>
+                <a:cs typeface="Microsoft JhengHei"/>
+              </a:rPr>
+              <a:t>●  </a:t>
+            </a:r>
+            <a:r>
+              <a:rPr sz="1550" b="1">
+                <a:solidFill>
+                  <a:srgbClr val="1E3A5F"/>
+                </a:solidFill>
+                <a:latin typeface="Microsoft JhengHei"/>
+                <a:ea typeface="Microsoft JhengHei"/>
+                <a:cs typeface="Microsoft JhengHei"/>
+              </a:rPr>
+              <a:t>逐字稿檢視　</a:t>
+            </a:r>
+            <a:r>
+              <a:rPr sz="1550">
+                <a:solidFill>
+                  <a:srgbClr val="434343"/>
+                </a:solidFill>
+                <a:latin typeface="Microsoft JhengHei"/>
+                <a:ea typeface="Microsoft JhengHei"/>
+                <a:cs typeface="Microsoft JhengHei"/>
+              </a:rPr>
+              <a:t>法說會錄音轉出的逐字稿可直接讀</a:t>
+            </a:r>
+          </a:p>
+          <a:p>
+            <a:pPr>
+              <a:lnSpc>
+                <a:spcPct val="115000"/>
+              </a:lnSpc>
+              <a:spcAft>
+                <a:spcPts val="1400"/>
+              </a:spcAft>
+            </a:pPr>
+            <a:r>
+              <a:rPr sz="1350" b="1">
+                <a:solidFill>
+                  <a:srgbClr val="6B4E9E"/>
+                </a:solidFill>
+                <a:latin typeface="Microsoft JhengHei"/>
+                <a:ea typeface="Microsoft JhengHei"/>
+                <a:cs typeface="Microsoft JhengHei"/>
+              </a:rPr>
+              <a:t>●  </a:t>
+            </a:r>
+            <a:r>
+              <a:rPr sz="1550" b="1">
+                <a:solidFill>
+                  <a:srgbClr val="1E3A5F"/>
+                </a:solidFill>
+                <a:latin typeface="Microsoft JhengHei"/>
+                <a:ea typeface="Microsoft JhengHei"/>
+                <a:cs typeface="Microsoft JhengHei"/>
+              </a:rPr>
+              <a:t>上傳新資料　</a:t>
+            </a:r>
+            <a:r>
+              <a:rPr sz="1550">
+                <a:solidFill>
+                  <a:srgbClr val="434343"/>
+                </a:solidFill>
+                <a:latin typeface="Microsoft JhengHei"/>
+                <a:ea typeface="Microsoft JhengHei"/>
+                <a:cs typeface="Microsoft JhengHei"/>
+              </a:rPr>
+              <a:t>PDF→VLM／錄音→STT，背景解析＋進度條</a:t>
+            </a:r>
+          </a:p>
+          <a:p>
+            <a:pPr>
+              <a:lnSpc>
+                <a:spcPct val="115000"/>
+              </a:lnSpc>
+              <a:spcAft>
+                <a:spcPts val="1400"/>
+              </a:spcAft>
+            </a:pPr>
+            <a:r>
+              <a:rPr sz="1350" b="1">
+                <a:solidFill>
+                  <a:srgbClr val="6B4E9E"/>
+                </a:solidFill>
+                <a:latin typeface="Microsoft JhengHei"/>
+                <a:ea typeface="Microsoft JhengHei"/>
+                <a:cs typeface="Microsoft JhengHei"/>
+              </a:rPr>
+              <a:t>●  </a:t>
+            </a:r>
+            <a:r>
+              <a:rPr sz="1550" b="1">
+                <a:solidFill>
+                  <a:srgbClr val="1E3A5F"/>
+                </a:solidFill>
+                <a:latin typeface="Microsoft JhengHei"/>
+                <a:ea typeface="Microsoft JhengHei"/>
+                <a:cs typeface="Microsoft JhengHei"/>
+              </a:rPr>
+              <a:t>即時擴充　</a:t>
+            </a:r>
+            <a:r>
+              <a:rPr sz="1550">
+                <a:solidFill>
+                  <a:srgbClr val="434343"/>
+                </a:solidFill>
+                <a:latin typeface="Microsoft JhengHei"/>
+                <a:ea typeface="Microsoft JhengHei"/>
+                <a:cs typeface="Microsoft JhengHei"/>
+              </a:rPr>
+              <a:t>上傳完自動更新，其他頁馬上看得到</a:t>
+            </a:r>
+          </a:p>
+        </p:txBody>
+      </p:sp>
+      <p:sp>
+        <p:nvSpPr>
+          <p:cNvPr id="5" name="Rounded Rectangle 4"/>
+          <p:cNvSpPr/>
+          <p:nvPr/>
+        </p:nvSpPr>
+        <p:spPr>
+          <a:xfrm>
+            <a:off x="5943600" y="1965960"/>
+            <a:ext cx="5605272" cy="3977639"/>
+          </a:xfrm>
+          <a:prstGeom prst="roundRect">
+            <a:avLst>
+              <a:gd name="adj" fmla="val 8000"/>
+            </a:avLst>
+          </a:prstGeom>
+          <a:solidFill>
+            <a:srgbClr val="FFFFFF"/>
+          </a:solidFill>
+          <a:ln w="15240">
+            <a:solidFill>
+              <a:srgbClr val="D8DEE6"/>
+            </a:solidFill>
+          </a:ln>
+          <a:effectLst/>
+        </p:spPr>
+        <p:style>
+          <a:lnRef idx="1">
+            <a:schemeClr val="accent1"/>
+          </a:lnRef>
+          <a:fillRef idx="3">
+            <a:schemeClr val="accent1"/>
+          </a:fillRef>
+          <a:effectRef idx="2">
+            <a:schemeClr val="accent1"/>
+          </a:effectRef>
+          <a:fontRef idx="minor">
+            <a:schemeClr val="lt1"/>
+          </a:fontRef>
+        </p:style>
+        <p:txBody>
+          <a:bodyPr rtlCol="0" anchor="ctr"/>
+          <a:lstStyle/>
+          <a:p>
+            <a:pPr algn="ctr"/>
+          </a:p>
+        </p:txBody>
+      </p:sp>
+      <p:sp>
+        <p:nvSpPr>
+          <p:cNvPr id="6" name="Rectangle 5"/>
+          <p:cNvSpPr/>
+          <p:nvPr/>
+        </p:nvSpPr>
+        <p:spPr>
+          <a:xfrm>
+            <a:off x="5943600" y="1965960"/>
+            <a:ext cx="5605272" cy="457200"/>
+          </a:xfrm>
+          <a:prstGeom prst="rect">
+            <a:avLst/>
+          </a:prstGeom>
+          <a:solidFill>
+            <a:srgbClr val="1E3A5F"/>
+          </a:solidFill>
+          <a:ln>
+            <a:noFill/>
+          </a:ln>
+          <a:effectLst/>
+        </p:spPr>
+        <p:style>
+          <a:lnRef idx="1">
+            <a:schemeClr val="accent1"/>
+          </a:lnRef>
+          <a:fillRef idx="3">
+            <a:schemeClr val="accent1"/>
+          </a:fillRef>
+          <a:effectRef idx="2">
+            <a:schemeClr val="accent1"/>
+          </a:effectRef>
+          <a:fontRef idx="minor">
+            <a:schemeClr val="lt1"/>
+          </a:fontRef>
+        </p:style>
+        <p:txBody>
+          <a:bodyPr rtlCol="0" anchor="ctr"/>
+          <a:lstStyle/>
+          <a:p>
+            <a:pPr algn="ctr"/>
+          </a:p>
+        </p:txBody>
+      </p:sp>
+      <p:sp>
+        <p:nvSpPr>
+          <p:cNvPr id="7" name="Oval 6"/>
+          <p:cNvSpPr/>
+          <p:nvPr/>
+        </p:nvSpPr>
+        <p:spPr>
+          <a:xfrm>
+            <a:off x="6144768" y="2121408"/>
+            <a:ext cx="146304" cy="146304"/>
+          </a:xfrm>
+          <a:prstGeom prst="ellipse">
+            <a:avLst/>
+          </a:prstGeom>
+          <a:solidFill>
+            <a:srgbClr val="C0392B"/>
+          </a:solidFill>
+          <a:ln>
+            <a:noFill/>
+          </a:ln>
+          <a:effectLst/>
+        </p:spPr>
+        <p:style>
+          <a:lnRef idx="1">
+            <a:schemeClr val="accent1"/>
+          </a:lnRef>
+          <a:fillRef idx="3">
+            <a:schemeClr val="accent1"/>
+          </a:fillRef>
+          <a:effectRef idx="2">
+            <a:schemeClr val="accent1"/>
+          </a:effectRef>
+          <a:fontRef idx="minor">
+            <a:schemeClr val="lt1"/>
+          </a:fontRef>
+        </p:style>
+        <p:txBody>
+          <a:bodyPr rtlCol="0" anchor="ctr"/>
+          <a:lstStyle/>
+          <a:p>
+            <a:pPr algn="ctr"/>
+          </a:p>
+        </p:txBody>
+      </p:sp>
+      <p:sp>
+        <p:nvSpPr>
+          <p:cNvPr id="8" name="Oval 7"/>
+          <p:cNvSpPr/>
+          <p:nvPr/>
+        </p:nvSpPr>
+        <p:spPr>
+          <a:xfrm>
+            <a:off x="6400800" y="2121408"/>
+            <a:ext cx="146304" cy="146304"/>
+          </a:xfrm>
+          <a:prstGeom prst="ellipse">
+            <a:avLst/>
+          </a:prstGeom>
+          <a:solidFill>
+            <a:srgbClr val="F5C142"/>
+          </a:solidFill>
+          <a:ln>
+            <a:noFill/>
+          </a:ln>
+          <a:effectLst/>
+        </p:spPr>
+        <p:style>
+          <a:lnRef idx="1">
+            <a:schemeClr val="accent1"/>
+          </a:lnRef>
+          <a:fillRef idx="3">
+            <a:schemeClr val="accent1"/>
+          </a:fillRef>
+          <a:effectRef idx="2">
+            <a:schemeClr val="accent1"/>
+          </a:effectRef>
+          <a:fontRef idx="minor">
+            <a:schemeClr val="lt1"/>
+          </a:fontRef>
+        </p:style>
+        <p:txBody>
+          <a:bodyPr rtlCol="0" anchor="ctr"/>
+          <a:lstStyle/>
+          <a:p>
+            <a:pPr algn="ctr"/>
+          </a:p>
+        </p:txBody>
+      </p:sp>
+      <p:sp>
+        <p:nvSpPr>
+          <p:cNvPr id="9" name="Oval 8"/>
+          <p:cNvSpPr/>
+          <p:nvPr/>
+        </p:nvSpPr>
+        <p:spPr>
+          <a:xfrm>
+            <a:off x="6656831" y="2121408"/>
+            <a:ext cx="146304" cy="146304"/>
+          </a:xfrm>
+          <a:prstGeom prst="ellipse">
+            <a:avLst/>
+          </a:prstGeom>
+          <a:solidFill>
+            <a:srgbClr val="2E7D46"/>
+          </a:solidFill>
+          <a:ln>
+            <a:noFill/>
+          </a:ln>
+          <a:effectLst/>
+        </p:spPr>
+        <p:style>
+          <a:lnRef idx="1">
+            <a:schemeClr val="accent1"/>
+          </a:lnRef>
+          <a:fillRef idx="3">
+            <a:schemeClr val="accent1"/>
+          </a:fillRef>
+          <a:effectRef idx="2">
+            <a:schemeClr val="accent1"/>
+          </a:effectRef>
+          <a:fontRef idx="minor">
+            <a:schemeClr val="lt1"/>
+          </a:fontRef>
+        </p:style>
+        <p:txBody>
+          <a:bodyPr rtlCol="0" anchor="ctr"/>
+          <a:lstStyle/>
+          <a:p>
+            <a:pPr algn="ctr"/>
+          </a:p>
+        </p:txBody>
+      </p:sp>
+      <p:sp>
+        <p:nvSpPr>
+          <p:cNvPr id="10" name="TextBox 9"/>
+          <p:cNvSpPr txBox="1"/>
+          <p:nvPr/>
+        </p:nvSpPr>
+        <p:spPr>
+          <a:xfrm>
+            <a:off x="7040880" y="2039112"/>
+            <a:ext cx="4325112" cy="320040"/>
+          </a:xfrm>
+          <a:prstGeom prst="rect">
+            <a:avLst/>
+          </a:prstGeom>
+          <a:noFill/>
+        </p:spPr>
+        <p:txBody>
+          <a:bodyPr wrap="square" anchor="ctr" lIns="0" rIns="0" tIns="0" bIns="0">
+            <a:spAutoFit/>
+          </a:bodyPr>
+          <a:lstStyle/>
+          <a:p>
+            <a:pPr algn="l">
+              <a:lnSpc>
+                <a:spcPct val="100000"/>
+              </a:lnSpc>
+              <a:spcBef>
+                <a:spcPts val="0"/>
+              </a:spcBef>
+              <a:spcAft>
+                <a:spcPts val="400"/>
+              </a:spcAft>
+            </a:pPr>
+            <a:r>
+              <a:rPr sz="1150" b="1">
+                <a:solidFill>
+                  <a:srgbClr val="FFFFFF"/>
+                </a:solidFill>
+                <a:latin typeface="Microsoft JhengHei"/>
+                <a:ea typeface="Microsoft JhengHei"/>
+                <a:cs typeface="Microsoft JhengHei"/>
+              </a:rPr>
+              <a:t>有你蒸好 · 財報分析</a:t>
+            </a:r>
+          </a:p>
+        </p:txBody>
+      </p:sp>
+      <p:sp>
+        <p:nvSpPr>
+          <p:cNvPr id="11" name="TextBox 10"/>
+          <p:cNvSpPr txBox="1"/>
+          <p:nvPr/>
+        </p:nvSpPr>
+        <p:spPr>
+          <a:xfrm>
+            <a:off x="6309360" y="3337560"/>
+            <a:ext cx="4873752" cy="1280160"/>
+          </a:xfrm>
+          <a:prstGeom prst="rect">
+            <a:avLst/>
+          </a:prstGeom>
+          <a:noFill/>
+        </p:spPr>
+        <p:txBody>
+          <a:bodyPr wrap="square" anchor="ctr" lIns="0" rIns="0" tIns="0" bIns="0">
+            <a:spAutoFit/>
+          </a:bodyPr>
+          <a:lstStyle/>
+          <a:p>
+            <a:pPr algn="ctr">
+              <a:lnSpc>
+                <a:spcPct val="100000"/>
+              </a:lnSpc>
+              <a:spcBef>
+                <a:spcPts val="0"/>
+              </a:spcBef>
+              <a:spcAft>
+                <a:spcPts val="800"/>
+              </a:spcAft>
+            </a:pPr>
+            <a:r>
+              <a:rPr sz="1500" b="1">
+                <a:solidFill>
+                  <a:srgbClr val="1E3A5F"/>
+                </a:solidFill>
+                <a:latin typeface="Microsoft JhengHei"/>
+                <a:ea typeface="Microsoft JhengHei"/>
+                <a:cs typeface="Microsoft JhengHei"/>
+              </a:rPr>
+              <a:t>資料來源總覽 ＋ 上傳新資料</a:t>
+            </a:r>
+          </a:p>
+          <a:p>
+            <a:pPr algn="ctr">
+              <a:lnSpc>
+                <a:spcPct val="100000"/>
+              </a:lnSpc>
+              <a:spcBef>
+                <a:spcPts val="0"/>
+              </a:spcBef>
+              <a:spcAft>
+                <a:spcPts val="800"/>
+              </a:spcAft>
+            </a:pPr>
+            <a:r>
+              <a:rPr sz="1250" b="0">
+                <a:solidFill>
+                  <a:srgbClr val="767C87"/>
+                </a:solidFill>
+                <a:latin typeface="Microsoft JhengHei"/>
+                <a:ea typeface="Microsoft JhengHei"/>
+                <a:cs typeface="Microsoft JhengHei"/>
+              </a:rPr>
+              <a:t>（此處貼上實機操作截圖，或現場 Demo）</a:t>
+            </a:r>
+          </a:p>
+        </p:txBody>
+      </p:sp>
+      <p:sp>
+        <p:nvSpPr>
+          <p:cNvPr id="12" name="TextBox 11"/>
+          <p:cNvSpPr txBox="1"/>
+          <p:nvPr/>
+        </p:nvSpPr>
+        <p:spPr>
+          <a:xfrm>
+            <a:off x="11094415" y="6400800"/>
+            <a:ext cx="731520" cy="274320"/>
+          </a:xfrm>
+          <a:prstGeom prst="rect">
+            <a:avLst/>
+          </a:prstGeom>
+          <a:noFill/>
+        </p:spPr>
+        <p:txBody>
+          <a:bodyPr wrap="square" anchor="t" lIns="0" rIns="0" tIns="0" bIns="0">
+            <a:spAutoFit/>
+          </a:bodyPr>
+          <a:lstStyle/>
+          <a:p>
+            <a:pPr algn="r">
+              <a:lnSpc>
+                <a:spcPct val="100000"/>
+              </a:lnSpc>
+              <a:spcBef>
+                <a:spcPts val="0"/>
+              </a:spcBef>
+              <a:spcAft>
+                <a:spcPts val="400"/>
+              </a:spcAft>
+            </a:pPr>
+            <a:r>
+              <a:rPr sz="1100" b="0">
+                <a:solidFill>
+                  <a:srgbClr val="767C87"/>
+                </a:solidFill>
+                <a:latin typeface="Microsoft JhengHei"/>
+                <a:ea typeface="Microsoft JhengHei"/>
+                <a:cs typeface="Microsoft JhengHei"/>
+              </a:rPr>
+              <a:t>13</a:t>
+            </a:r>
+          </a:p>
+        </p:txBody>
+      </p:sp>
+    </p:spTree>
+  </p:cSld>
+  <p:clrMapOvr>
+    <a:masterClrMapping/>
+  </p:clrMapOvr>
+</p:sld>
+</file>
+
+<file path=ppt/slides/slide14.xml><?xml version="1.0" encoding="utf-8"?>
+<p:sld xmlns:a="http://schemas.openxmlformats.org/drawingml/2006/main" xmlns:p="http://schemas.openxmlformats.org/presentationml/2006/main" xmlns:r="http://schemas.openxmlformats.org/officeDocument/2006/relationships">
+  <p:cSld>
+    <p:bg>
+      <p:bgPr>
+        <a:solidFill>
+          <a:srgbClr val="FFFFFF"/>
+        </a:solidFill>
+        <a:effectLst/>
+      </p:bgPr>
+    </p:bg>
+    <p:spTree>
+      <p:nvGrpSpPr>
+        <p:cNvPr id="1" name=""/>
+        <p:cNvGrpSpPr/>
+        <p:nvPr/>
+      </p:nvGrpSpPr>
+      <p:grpSpPr/>
+      <p:sp>
+        <p:nvSpPr>
+          <p:cNvPr id="2" name="TextBox 1"/>
+          <p:cNvSpPr txBox="1"/>
+          <p:nvPr/>
+        </p:nvSpPr>
+        <p:spPr>
+          <a:xfrm>
+            <a:off x="640080" y="502920"/>
+            <a:ext cx="7315200" cy="365760"/>
+          </a:xfrm>
+          <a:prstGeom prst="rect">
+            <a:avLst/>
+          </a:prstGeom>
+          <a:noFill/>
+        </p:spPr>
+        <p:txBody>
+          <a:bodyPr wrap="square" anchor="t" lIns="0" rIns="0" tIns="0" bIns="0">
+            <a:spAutoFit/>
+          </a:bodyPr>
+          <a:lstStyle/>
+          <a:p>
+            <a:pPr algn="l">
+              <a:lnSpc>
+                <a:spcPct val="100000"/>
+              </a:lnSpc>
+              <a:spcBef>
+                <a:spcPts val="0"/>
+              </a:spcBef>
+              <a:spcAft>
+                <a:spcPts val="400"/>
+              </a:spcAft>
+            </a:pPr>
+            <a:r>
+              <a:rPr sz="1400" b="1">
+                <a:solidFill>
+                  <a:srgbClr val="6B4E9E"/>
+                </a:solidFill>
+                <a:latin typeface="Microsoft JhengHei"/>
+                <a:ea typeface="Microsoft JhengHei"/>
+                <a:cs typeface="Microsoft JhengHei"/>
+              </a:rPr>
               <a:t>介面設計與系統呈現 · 15%</a:t>
             </a:r>
           </a:p>
@@ -6738,7 +7486,7 @@
                 <a:ea typeface="Microsoft JhengHei"/>
                 <a:cs typeface="Microsoft JhengHei"/>
               </a:rPr>
-              <a:t>13</a:t>
+              <a:t>14</a:t>
             </a:r>
           </a:p>
         </p:txBody>
@@ -6751,7 +7499,7 @@
 </p:sld>
 </file>
 
-<file path=ppt/slides/slide14.xml><?xml version="1.0" encoding="utf-8"?>
+<file path=ppt/slides/slide15.xml><?xml version="1.0" encoding="utf-8"?>
 <p:sld xmlns:a="http://schemas.openxmlformats.org/drawingml/2006/main" xmlns:p="http://schemas.openxmlformats.org/presentationml/2006/main" xmlns:r="http://schemas.openxmlformats.org/officeDocument/2006/relationships">
   <p:cSld>
     <p:bg>
@@ -6823,8 +7571,8 @@
         </p:nvSpPr>
         <p:spPr>
           <a:xfrm>
-            <a:off x="640080" y="502920"/>
-            <a:ext cx="7315200" cy="365760"/>
+            <a:off x="640080" y="457200"/>
+            <a:ext cx="10058400" cy="365760"/>
           </a:xfrm>
           <a:prstGeom prst="rect">
             <a:avLst/>
@@ -6849,7 +7597,7 @@
               </a:spcAft>
             </a:pPr>
             <a:r>
-              <a:rPr sz="1400" b="1">
+              <a:rPr sz="1300" b="1">
                 <a:solidFill>
                   <a:srgbClr val="CADCFC"/>
                 </a:solidFill>
@@ -6857,7 +7605,7 @@
                 <a:ea typeface="Microsoft JhengHei"/>
                 <a:cs typeface="Microsoft JhengHei"/>
               </a:rPr>
-              <a:t>整合創新能力 · 15%</a:t>
+              <a:t>DEPLOYMENT &amp; INNOVATION · 第二次諮詢重點 · 整合創新 15%</a:t>
             </a:r>
           </a:p>
         </p:txBody>
@@ -6870,8 +7618,8 @@
         </p:nvSpPr>
         <p:spPr>
           <a:xfrm>
-            <a:off x="640080" y="868680"/>
-            <a:ext cx="10972800" cy="731520"/>
+            <a:off x="640080" y="822960"/>
+            <a:ext cx="10972800" cy="640080"/>
           </a:xfrm>
           <a:prstGeom prst="rect">
             <a:avLst/>
@@ -6896,7 +7644,7 @@
               </a:spcAft>
             </a:pPr>
             <a:r>
-              <a:rPr sz="3200" b="1">
+              <a:rPr sz="3000" b="1">
                 <a:solidFill>
                   <a:srgbClr val="FFFFFF"/>
                 </a:solidFill>
@@ -6904,7 +7652,7 @@
                 <a:ea typeface="Microsoft JhengHei"/>
                 <a:cs typeface="Microsoft JhengHei"/>
               </a:rPr>
-              <a:t>整合創新 — Vibe Coding</a:t>
+              <a:t>部署架構與整合創新</a:t>
             </a:r>
           </a:p>
         </p:txBody>
@@ -6917,7 +7665,7 @@
         </p:nvSpPr>
         <p:spPr>
           <a:xfrm>
-            <a:off x="640080" y="1572768"/>
+            <a:off x="640080" y="1463040"/>
             <a:ext cx="10972800" cy="457200"/>
           </a:xfrm>
           <a:prstGeom prst="rect">
@@ -6951,7 +7699,7 @@
                 <a:ea typeface="Microsoft JhengHei"/>
                 <a:cs typeface="Microsoft JhengHei"/>
               </a:rPr>
-              <a:t>以自然語言開發，把多個 API 組成一個完整的 AI 應用</a:t>
+              <a:t>已上線、可介接、以 Vibe Coding 串接多個 API 的完整系統</a:t>
             </a:r>
           </a:p>
         </p:txBody>
@@ -6964,8 +7712,8 @@
         </p:nvSpPr>
         <p:spPr>
           <a:xfrm>
-            <a:off x="640080" y="2377440"/>
-            <a:ext cx="2606040" cy="2194560"/>
+            <a:off x="640080" y="2148840"/>
+            <a:ext cx="2286000" cy="1234440"/>
           </a:xfrm>
           <a:prstGeom prst="roundRect">
             <a:avLst>
@@ -7012,8 +7760,8 @@
         </p:nvSpPr>
         <p:spPr>
           <a:xfrm>
-            <a:off x="868680" y="2651760"/>
-            <a:ext cx="2148840" cy="548640"/>
+            <a:off x="640080" y="2487168"/>
+            <a:ext cx="2286000" cy="640080"/>
           </a:xfrm>
           <a:prstGeom prst="rect">
             <a:avLst/>
@@ -7021,12 +7769,12 @@
           <a:noFill/>
         </p:spPr>
         <p:txBody>
-          <a:bodyPr wrap="square" anchor="t" lIns="0" rIns="0" tIns="0" bIns="0">
+          <a:bodyPr wrap="square" anchor="ctr" lIns="0" rIns="0" tIns="0" bIns="0">
             <a:spAutoFit/>
           </a:bodyPr>
           <a:lstStyle/>
           <a:p>
-            <a:pPr algn="l">
+            <a:pPr algn="ctr">
               <a:lnSpc>
                 <a:spcPct val="100000"/>
               </a:lnSpc>
@@ -7038,7 +7786,7 @@
               </a:spcAft>
             </a:pPr>
             <a:r>
-              <a:rPr sz="1800" b="1">
+              <a:rPr sz="1500" b="1">
                 <a:solidFill>
                   <a:srgbClr val="FFFFFF"/>
                 </a:solidFill>
@@ -7046,21 +7794,113 @@
                 <a:ea typeface="Microsoft JhengHei"/>
                 <a:cs typeface="Microsoft JhengHei"/>
               </a:rPr>
-              <a:t>Gemini</a:t>
-            </a:r>
-          </a:p>
-        </p:txBody>
-      </p:sp>
-      <p:sp>
-        <p:nvSpPr>
-          <p:cNvPr id="8" name="TextBox 7"/>
+              <a:t>使用者瀏覽器</a:t>
+            </a:r>
+          </a:p>
+        </p:txBody>
+      </p:sp>
+      <p:sp>
+        <p:nvSpPr>
+          <p:cNvPr id="8" name="Right Arrow 7"/>
+          <p:cNvSpPr/>
+          <p:nvPr/>
+        </p:nvSpPr>
+        <p:spPr>
+          <a:xfrm>
+            <a:off x="3063240" y="2304288"/>
+            <a:ext cx="502920" cy="502920"/>
+          </a:xfrm>
+          <a:prstGeom prst="rightArrow">
+            <a:avLst/>
+          </a:prstGeom>
+          <a:solidFill>
+            <a:srgbClr val="CADCFC"/>
+          </a:solidFill>
+          <a:ln>
+            <a:noFill/>
+          </a:ln>
+          <a:effectLst/>
+        </p:spPr>
+        <p:style>
+          <a:lnRef idx="1">
+            <a:schemeClr val="accent1"/>
+          </a:lnRef>
+          <a:fillRef idx="3">
+            <a:schemeClr val="accent1"/>
+          </a:fillRef>
+          <a:effectRef idx="2">
+            <a:schemeClr val="accent1"/>
+          </a:effectRef>
+          <a:fontRef idx="minor">
+            <a:schemeClr val="lt1"/>
+          </a:fontRef>
+        </p:style>
+        <p:txBody>
+          <a:bodyPr rtlCol="0" anchor="ctr"/>
+          <a:lstStyle/>
+          <a:p>
+            <a:pPr algn="ctr"/>
+          </a:p>
+        </p:txBody>
+      </p:sp>
+      <p:sp>
+        <p:nvSpPr>
+          <p:cNvPr id="9" name="Rounded Rectangle 8"/>
+          <p:cNvSpPr/>
+          <p:nvPr/>
+        </p:nvSpPr>
+        <p:spPr>
+          <a:xfrm>
+            <a:off x="3703320" y="2148840"/>
+            <a:ext cx="2880360" cy="1234440"/>
+          </a:xfrm>
+          <a:prstGeom prst="roundRect">
+            <a:avLst>
+              <a:gd name="adj" fmla="val 8000"/>
+            </a:avLst>
+          </a:prstGeom>
+          <a:solidFill>
+            <a:srgbClr val="2E4E7A"/>
+          </a:solidFill>
+          <a:ln w="25400">
+            <a:solidFill>
+              <a:srgbClr val="6B4E9E"/>
+            </a:solidFill>
+          </a:ln>
+          <a:effectLst/>
+        </p:spPr>
+        <p:style>
+          <a:lnRef idx="1">
+            <a:schemeClr val="accent1"/>
+          </a:lnRef>
+          <a:fillRef idx="3">
+            <a:schemeClr val="accent1"/>
+          </a:fillRef>
+          <a:effectRef idx="2">
+            <a:schemeClr val="accent1"/>
+          </a:effectRef>
+          <a:fontRef idx="minor">
+            <a:schemeClr val="lt1"/>
+          </a:fontRef>
+        </p:style>
+        <p:txBody>
+          <a:bodyPr rtlCol="0" anchor="ctr"/>
+          <a:lstStyle/>
+          <a:p>
+            <a:pPr algn="ctr"/>
+          </a:p>
+        </p:txBody>
+      </p:sp>
+      <p:sp>
+        <p:nvSpPr>
+          <p:cNvPr id="10" name="TextBox 9"/>
           <p:cNvSpPr txBox="1"/>
           <p:nvPr/>
         </p:nvSpPr>
         <p:spPr>
           <a:xfrm>
-            <a:off x="868680" y="3337560"/>
-            <a:ext cx="2148840" cy="1097280"/>
+            <a:off x="3703320" y="2377440"/>
+            <a:ext cx="2880360" cy="914400"/>
           </a:xfrm>
           <a:prstGeom prst="rect">
             <a:avLst/>
@@ -7068,24 +7908,187 @@
           <a:noFill/>
         </p:spPr>
         <p:txBody>
-          <a:bodyPr wrap="square" anchor="t" lIns="0" rIns="0" tIns="0" bIns="0">
+          <a:bodyPr wrap="square" anchor="ctr" lIns="0" rIns="0" tIns="0" bIns="0">
             <a:spAutoFit/>
           </a:bodyPr>
           <a:lstStyle/>
           <a:p>
-            <a:pPr algn="l">
-              <a:lnSpc>
-                <a:spcPct val="120000"/>
+            <a:pPr algn="ctr">
+              <a:lnSpc>
+                <a:spcPct val="100000"/>
               </a:lnSpc>
               <a:spcBef>
                 <a:spcPts val="0"/>
               </a:spcBef>
               <a:spcAft>
+                <a:spcPts val="300"/>
+              </a:spcAft>
+            </a:pPr>
+            <a:r>
+              <a:rPr sz="1500" b="1">
+                <a:solidFill>
+                  <a:srgbClr val="FFFFFF"/>
+                </a:solidFill>
+                <a:latin typeface="Microsoft JhengHei"/>
+                <a:ea typeface="Microsoft JhengHei"/>
+                <a:cs typeface="Microsoft JhengHei"/>
+              </a:rPr>
+              <a:t>Render 雲端</a:t>
+            </a:r>
+          </a:p>
+          <a:p>
+            <a:pPr algn="ctr">
+              <a:lnSpc>
+                <a:spcPct val="100000"/>
+              </a:lnSpc>
+              <a:spcBef>
+                <a:spcPts val="0"/>
+              </a:spcBef>
+              <a:spcAft>
+                <a:spcPts val="300"/>
+              </a:spcAft>
+            </a:pPr>
+            <a:r>
+              <a:rPr sz="1250" b="0">
+                <a:solidFill>
+                  <a:srgbClr val="E8EDF4"/>
+                </a:solidFill>
+                <a:latin typeface="Microsoft JhengHei"/>
+                <a:ea typeface="Microsoft JhengHei"/>
+                <a:cs typeface="Microsoft JhengHei"/>
+              </a:rPr>
+              <a:t>FastAPI 前後端同源</a:t>
+            </a:r>
+          </a:p>
+        </p:txBody>
+      </p:sp>
+      <p:sp>
+        <p:nvSpPr>
+          <p:cNvPr id="11" name="Right Arrow 10"/>
+          <p:cNvSpPr/>
+          <p:nvPr/>
+        </p:nvSpPr>
+        <p:spPr>
+          <a:xfrm>
+            <a:off x="6720840" y="2304288"/>
+            <a:ext cx="502920" cy="502920"/>
+          </a:xfrm>
+          <a:prstGeom prst="rightArrow">
+            <a:avLst/>
+          </a:prstGeom>
+          <a:solidFill>
+            <a:srgbClr val="CADCFC"/>
+          </a:solidFill>
+          <a:ln>
+            <a:noFill/>
+          </a:ln>
+          <a:effectLst/>
+        </p:spPr>
+        <p:style>
+          <a:lnRef idx="1">
+            <a:schemeClr val="accent1"/>
+          </a:lnRef>
+          <a:fillRef idx="3">
+            <a:schemeClr val="accent1"/>
+          </a:fillRef>
+          <a:effectRef idx="2">
+            <a:schemeClr val="accent1"/>
+          </a:effectRef>
+          <a:fontRef idx="minor">
+            <a:schemeClr val="lt1"/>
+          </a:fontRef>
+        </p:style>
+        <p:txBody>
+          <a:bodyPr rtlCol="0" anchor="ctr"/>
+          <a:lstStyle/>
+          <a:p>
+            <a:pPr algn="ctr"/>
+          </a:p>
+        </p:txBody>
+      </p:sp>
+      <p:sp>
+        <p:nvSpPr>
+          <p:cNvPr id="12" name="Rounded Rectangle 11"/>
+          <p:cNvSpPr/>
+          <p:nvPr/>
+        </p:nvSpPr>
+        <p:spPr>
+          <a:xfrm>
+            <a:off x="7360920" y="2148840"/>
+            <a:ext cx="2011680" cy="512064"/>
+          </a:xfrm>
+          <a:prstGeom prst="roundRect">
+            <a:avLst>
+              <a:gd name="adj" fmla="val 8000"/>
+            </a:avLst>
+          </a:prstGeom>
+          <a:solidFill>
+            <a:srgbClr val="162C49"/>
+          </a:solidFill>
+          <a:ln w="12700">
+            <a:solidFill>
+              <a:srgbClr val="4A6692"/>
+            </a:solidFill>
+          </a:ln>
+          <a:effectLst/>
+        </p:spPr>
+        <p:style>
+          <a:lnRef idx="1">
+            <a:schemeClr val="accent1"/>
+          </a:lnRef>
+          <a:fillRef idx="3">
+            <a:schemeClr val="accent1"/>
+          </a:fillRef>
+          <a:effectRef idx="2">
+            <a:schemeClr val="accent1"/>
+          </a:effectRef>
+          <a:fontRef idx="minor">
+            <a:schemeClr val="lt1"/>
+          </a:fontRef>
+        </p:style>
+        <p:txBody>
+          <a:bodyPr rtlCol="0" anchor="ctr"/>
+          <a:lstStyle/>
+          <a:p>
+            <a:pPr algn="ctr"/>
+          </a:p>
+        </p:txBody>
+      </p:sp>
+      <p:sp>
+        <p:nvSpPr>
+          <p:cNvPr id="13" name="TextBox 12"/>
+          <p:cNvSpPr txBox="1"/>
+          <p:nvPr/>
+        </p:nvSpPr>
+        <p:spPr>
+          <a:xfrm>
+            <a:off x="7360920" y="2148840"/>
+            <a:ext cx="2011680" cy="512064"/>
+          </a:xfrm>
+          <a:prstGeom prst="rect">
+            <a:avLst/>
+          </a:prstGeom>
+          <a:noFill/>
+        </p:spPr>
+        <p:txBody>
+          <a:bodyPr wrap="square" anchor="ctr" lIns="0" rIns="0" tIns="0" bIns="0">
+            <a:spAutoFit/>
+          </a:bodyPr>
+          <a:lstStyle/>
+          <a:p>
+            <a:pPr algn="ctr">
+              <a:lnSpc>
+                <a:spcPct val="100000"/>
+              </a:lnSpc>
+              <a:spcBef>
+                <a:spcPts val="0"/>
+              </a:spcBef>
+              <a:spcAft>
                 <a:spcPts val="400"/>
               </a:spcAft>
             </a:pPr>
             <a:r>
-              <a:rPr sz="1300" b="0">
+              <a:rPr sz="1200" b="1">
                 <a:solidFill>
                   <a:srgbClr val="E8EDF4"/>
                 </a:solidFill>
@@ -7093,21 +8096,306 @@
                 <a:ea typeface="Microsoft JhengHei"/>
                 <a:cs typeface="Microsoft JhengHei"/>
               </a:rPr>
-              <a:t>VLM 解析簡報 · STT 轉錄音 · LLM 問答</a:t>
-            </a:r>
-          </a:p>
-        </p:txBody>
-      </p:sp>
-      <p:sp>
-        <p:nvSpPr>
-          <p:cNvPr id="9" name="Rounded Rectangle 8"/>
+              <a:t>ChromaDB 向量庫</a:t>
+            </a:r>
+          </a:p>
+        </p:txBody>
+      </p:sp>
+      <p:sp>
+        <p:nvSpPr>
+          <p:cNvPr id="14" name="Rounded Rectangle 13"/>
           <p:cNvSpPr/>
           <p:nvPr/>
         </p:nvSpPr>
         <p:spPr>
           <a:xfrm>
-            <a:off x="3502152" y="2377440"/>
-            <a:ext cx="2606040" cy="2194560"/>
+            <a:off x="9509760" y="2148840"/>
+            <a:ext cx="2011680" cy="512064"/>
+          </a:xfrm>
+          <a:prstGeom prst="roundRect">
+            <a:avLst>
+              <a:gd name="adj" fmla="val 8000"/>
+            </a:avLst>
+          </a:prstGeom>
+          <a:solidFill>
+            <a:srgbClr val="162C49"/>
+          </a:solidFill>
+          <a:ln w="12700">
+            <a:solidFill>
+              <a:srgbClr val="4A6692"/>
+            </a:solidFill>
+          </a:ln>
+          <a:effectLst/>
+        </p:spPr>
+        <p:style>
+          <a:lnRef idx="1">
+            <a:schemeClr val="accent1"/>
+          </a:lnRef>
+          <a:fillRef idx="3">
+            <a:schemeClr val="accent1"/>
+          </a:fillRef>
+          <a:effectRef idx="2">
+            <a:schemeClr val="accent1"/>
+          </a:effectRef>
+          <a:fontRef idx="minor">
+            <a:schemeClr val="lt1"/>
+          </a:fontRef>
+        </p:style>
+        <p:txBody>
+          <a:bodyPr rtlCol="0" anchor="ctr"/>
+          <a:lstStyle/>
+          <a:p>
+            <a:pPr algn="ctr"/>
+          </a:p>
+        </p:txBody>
+      </p:sp>
+      <p:sp>
+        <p:nvSpPr>
+          <p:cNvPr id="15" name="TextBox 14"/>
+          <p:cNvSpPr txBox="1"/>
+          <p:nvPr/>
+        </p:nvSpPr>
+        <p:spPr>
+          <a:xfrm>
+            <a:off x="9509760" y="2148840"/>
+            <a:ext cx="2011680" cy="512064"/>
+          </a:xfrm>
+          <a:prstGeom prst="rect">
+            <a:avLst/>
+          </a:prstGeom>
+          <a:noFill/>
+        </p:spPr>
+        <p:txBody>
+          <a:bodyPr wrap="square" anchor="ctr" lIns="0" rIns="0" tIns="0" bIns="0">
+            <a:spAutoFit/>
+          </a:bodyPr>
+          <a:lstStyle/>
+          <a:p>
+            <a:pPr algn="ctr">
+              <a:lnSpc>
+                <a:spcPct val="100000"/>
+              </a:lnSpc>
+              <a:spcBef>
+                <a:spcPts val="0"/>
+              </a:spcBef>
+              <a:spcAft>
+                <a:spcPts val="400"/>
+              </a:spcAft>
+            </a:pPr>
+            <a:r>
+              <a:rPr sz="1200" b="1">
+                <a:solidFill>
+                  <a:srgbClr val="E8EDF4"/>
+                </a:solidFill>
+                <a:latin typeface="Microsoft JhengHei"/>
+                <a:ea typeface="Microsoft JhengHei"/>
+                <a:cs typeface="Microsoft JhengHei"/>
+              </a:rPr>
+              <a:t>Graph 指標資料</a:t>
+            </a:r>
+          </a:p>
+        </p:txBody>
+      </p:sp>
+      <p:sp>
+        <p:nvSpPr>
+          <p:cNvPr id="16" name="Rounded Rectangle 15"/>
+          <p:cNvSpPr/>
+          <p:nvPr/>
+        </p:nvSpPr>
+        <p:spPr>
+          <a:xfrm>
+            <a:off x="7360920" y="2770632"/>
+            <a:ext cx="2011680" cy="512064"/>
+          </a:xfrm>
+          <a:prstGeom prst="roundRect">
+            <a:avLst>
+              <a:gd name="adj" fmla="val 8000"/>
+            </a:avLst>
+          </a:prstGeom>
+          <a:solidFill>
+            <a:srgbClr val="162C49"/>
+          </a:solidFill>
+          <a:ln w="12700">
+            <a:solidFill>
+              <a:srgbClr val="4A6692"/>
+            </a:solidFill>
+          </a:ln>
+          <a:effectLst/>
+        </p:spPr>
+        <p:style>
+          <a:lnRef idx="1">
+            <a:schemeClr val="accent1"/>
+          </a:lnRef>
+          <a:fillRef idx="3">
+            <a:schemeClr val="accent1"/>
+          </a:fillRef>
+          <a:effectRef idx="2">
+            <a:schemeClr val="accent1"/>
+          </a:effectRef>
+          <a:fontRef idx="minor">
+            <a:schemeClr val="lt1"/>
+          </a:fontRef>
+        </p:style>
+        <p:txBody>
+          <a:bodyPr rtlCol="0" anchor="ctr"/>
+          <a:lstStyle/>
+          <a:p>
+            <a:pPr algn="ctr"/>
+          </a:p>
+        </p:txBody>
+      </p:sp>
+      <p:sp>
+        <p:nvSpPr>
+          <p:cNvPr id="17" name="TextBox 16"/>
+          <p:cNvSpPr txBox="1"/>
+          <p:nvPr/>
+        </p:nvSpPr>
+        <p:spPr>
+          <a:xfrm>
+            <a:off x="7360920" y="2770632"/>
+            <a:ext cx="2011680" cy="512064"/>
+          </a:xfrm>
+          <a:prstGeom prst="rect">
+            <a:avLst/>
+          </a:prstGeom>
+          <a:noFill/>
+        </p:spPr>
+        <p:txBody>
+          <a:bodyPr wrap="square" anchor="ctr" lIns="0" rIns="0" tIns="0" bIns="0">
+            <a:spAutoFit/>
+          </a:bodyPr>
+          <a:lstStyle/>
+          <a:p>
+            <a:pPr algn="ctr">
+              <a:lnSpc>
+                <a:spcPct val="100000"/>
+              </a:lnSpc>
+              <a:spcBef>
+                <a:spcPts val="0"/>
+              </a:spcBef>
+              <a:spcAft>
+                <a:spcPts val="400"/>
+              </a:spcAft>
+            </a:pPr>
+            <a:r>
+              <a:rPr sz="1200" b="1">
+                <a:solidFill>
+                  <a:srgbClr val="E8EDF4"/>
+                </a:solidFill>
+                <a:latin typeface="Microsoft JhengHei"/>
+                <a:ea typeface="Microsoft JhengHei"/>
+                <a:cs typeface="Microsoft JhengHei"/>
+              </a:rPr>
+              <a:t>Gemini API</a:t>
+            </a:r>
+          </a:p>
+        </p:txBody>
+      </p:sp>
+      <p:sp>
+        <p:nvSpPr>
+          <p:cNvPr id="18" name="Rounded Rectangle 17"/>
+          <p:cNvSpPr/>
+          <p:nvPr/>
+        </p:nvSpPr>
+        <p:spPr>
+          <a:xfrm>
+            <a:off x="9509760" y="2770632"/>
+            <a:ext cx="2011680" cy="512064"/>
+          </a:xfrm>
+          <a:prstGeom prst="roundRect">
+            <a:avLst>
+              <a:gd name="adj" fmla="val 8000"/>
+            </a:avLst>
+          </a:prstGeom>
+          <a:solidFill>
+            <a:srgbClr val="162C49"/>
+          </a:solidFill>
+          <a:ln w="12700">
+            <a:solidFill>
+              <a:srgbClr val="4A6692"/>
+            </a:solidFill>
+          </a:ln>
+          <a:effectLst/>
+        </p:spPr>
+        <p:style>
+          <a:lnRef idx="1">
+            <a:schemeClr val="accent1"/>
+          </a:lnRef>
+          <a:fillRef idx="3">
+            <a:schemeClr val="accent1"/>
+          </a:fillRef>
+          <a:effectRef idx="2">
+            <a:schemeClr val="accent1"/>
+          </a:effectRef>
+          <a:fontRef idx="minor">
+            <a:schemeClr val="lt1"/>
+          </a:fontRef>
+        </p:style>
+        <p:txBody>
+          <a:bodyPr rtlCol="0" anchor="ctr"/>
+          <a:lstStyle/>
+          <a:p>
+            <a:pPr algn="ctr"/>
+          </a:p>
+        </p:txBody>
+      </p:sp>
+      <p:sp>
+        <p:nvSpPr>
+          <p:cNvPr id="19" name="TextBox 18"/>
+          <p:cNvSpPr txBox="1"/>
+          <p:nvPr/>
+        </p:nvSpPr>
+        <p:spPr>
+          <a:xfrm>
+            <a:off x="9509760" y="2770632"/>
+            <a:ext cx="2011680" cy="512064"/>
+          </a:xfrm>
+          <a:prstGeom prst="rect">
+            <a:avLst/>
+          </a:prstGeom>
+          <a:noFill/>
+        </p:spPr>
+        <p:txBody>
+          <a:bodyPr wrap="square" anchor="ctr" lIns="0" rIns="0" tIns="0" bIns="0">
+            <a:spAutoFit/>
+          </a:bodyPr>
+          <a:lstStyle/>
+          <a:p>
+            <a:pPr algn="ctr">
+              <a:lnSpc>
+                <a:spcPct val="100000"/>
+              </a:lnSpc>
+              <a:spcBef>
+                <a:spcPts val="0"/>
+              </a:spcBef>
+              <a:spcAft>
+                <a:spcPts val="400"/>
+              </a:spcAft>
+            </a:pPr>
+            <a:r>
+              <a:rPr sz="1200" b="1">
+                <a:solidFill>
+                  <a:srgbClr val="E8EDF4"/>
+                </a:solidFill>
+                <a:latin typeface="Microsoft JhengHei"/>
+                <a:ea typeface="Microsoft JhengHei"/>
+                <a:cs typeface="Microsoft JhengHei"/>
+              </a:rPr>
+              <a:t>EAP 平台 API</a:t>
+            </a:r>
+          </a:p>
+        </p:txBody>
+      </p:sp>
+      <p:sp>
+        <p:nvSpPr>
+          <p:cNvPr id="20" name="Rounded Rectangle 19"/>
+          <p:cNvSpPr/>
+          <p:nvPr/>
+        </p:nvSpPr>
+        <p:spPr>
+          <a:xfrm>
+            <a:off x="640080" y="3657600"/>
+            <a:ext cx="2606040" cy="1143000"/>
           </a:xfrm>
           <a:prstGeom prst="roundRect">
             <a:avLst>
@@ -7148,14 +8436,14 @@
       </p:sp>
       <p:sp>
         <p:nvSpPr>
-          <p:cNvPr id="10" name="TextBox 9"/>
+          <p:cNvPr id="21" name="TextBox 20"/>
           <p:cNvSpPr txBox="1"/>
           <p:nvPr/>
         </p:nvSpPr>
         <p:spPr>
           <a:xfrm>
-            <a:off x="3730752" y="2651760"/>
-            <a:ext cx="2148840" cy="548640"/>
+            <a:off x="841247" y="3840480"/>
+            <a:ext cx="2203704" cy="457200"/>
           </a:xfrm>
           <a:prstGeom prst="rect">
             <a:avLst/>
@@ -7180,7 +8468,7 @@
               </a:spcAft>
             </a:pPr>
             <a:r>
-              <a:rPr sz="1800" b="1">
+              <a:rPr sz="1500" b="1">
                 <a:solidFill>
                   <a:srgbClr val="FFFFFF"/>
                 </a:solidFill>
@@ -7188,21 +8476,21 @@
                 <a:ea typeface="Microsoft JhengHei"/>
                 <a:cs typeface="Microsoft JhengHei"/>
               </a:rPr>
-              <a:t>EAP 平台</a:t>
-            </a:r>
-          </a:p>
-        </p:txBody>
-      </p:sp>
-      <p:sp>
-        <p:nvSpPr>
-          <p:cNvPr id="11" name="TextBox 10"/>
+              <a:t>Gemini</a:t>
+            </a:r>
+          </a:p>
+        </p:txBody>
+      </p:sp>
+      <p:sp>
+        <p:nvSpPr>
+          <p:cNvPr id="22" name="TextBox 21"/>
           <p:cNvSpPr txBox="1"/>
           <p:nvPr/>
         </p:nvSpPr>
         <p:spPr>
           <a:xfrm>
-            <a:off x="3730752" y="3337560"/>
-            <a:ext cx="2148840" cy="1097280"/>
+            <a:off x="841247" y="4279392"/>
+            <a:ext cx="2203704" cy="457200"/>
           </a:xfrm>
           <a:prstGeom prst="rect">
             <a:avLst/>
@@ -7217,7 +8505,7 @@
           <a:p>
             <a:pPr algn="l">
               <a:lnSpc>
-                <a:spcPct val="120000"/>
+                <a:spcPct val="110000"/>
               </a:lnSpc>
               <a:spcBef>
                 <a:spcPts val="0"/>
@@ -7227,7 +8515,7 @@
               </a:spcAft>
             </a:pPr>
             <a:r>
-              <a:rPr sz="1300" b="0">
+              <a:rPr sz="1150" b="0">
                 <a:solidFill>
                   <a:srgbClr val="E8EDF4"/>
                 </a:solidFill>
@@ -7235,21 +8523,21 @@
                 <a:ea typeface="Microsoft JhengHei"/>
                 <a:cs typeface="Microsoft JhengHei"/>
               </a:rPr>
-              <a:t>Hybrid RAG（VectorRAG＋GraphRAG）</a:t>
-            </a:r>
-          </a:p>
-        </p:txBody>
-      </p:sp>
-      <p:sp>
-        <p:nvSpPr>
-          <p:cNvPr id="12" name="Rounded Rectangle 11"/>
+              <a:t>VLM 解析 · STT 轉錄 · LLM</a:t>
+            </a:r>
+          </a:p>
+        </p:txBody>
+      </p:sp>
+      <p:sp>
+        <p:nvSpPr>
+          <p:cNvPr id="23" name="Rounded Rectangle 22"/>
           <p:cNvSpPr/>
           <p:nvPr/>
         </p:nvSpPr>
         <p:spPr>
           <a:xfrm>
-            <a:off x="6364224" y="2377440"/>
-            <a:ext cx="2606040" cy="2194560"/>
+            <a:off x="3502152" y="3657600"/>
+            <a:ext cx="2606040" cy="1143000"/>
           </a:xfrm>
           <a:prstGeom prst="roundRect">
             <a:avLst>
@@ -7290,14 +8578,14 @@
       </p:sp>
       <p:sp>
         <p:nvSpPr>
-          <p:cNvPr id="13" name="TextBox 12"/>
+          <p:cNvPr id="24" name="TextBox 23"/>
           <p:cNvSpPr txBox="1"/>
           <p:nvPr/>
         </p:nvSpPr>
         <p:spPr>
           <a:xfrm>
-            <a:off x="6592824" y="2651760"/>
-            <a:ext cx="2148840" cy="548640"/>
+            <a:off x="3703320" y="3840480"/>
+            <a:ext cx="2203704" cy="457200"/>
           </a:xfrm>
           <a:prstGeom prst="rect">
             <a:avLst/>
@@ -7322,7 +8610,7 @@
               </a:spcAft>
             </a:pPr>
             <a:r>
-              <a:rPr sz="1800" b="1">
+              <a:rPr sz="1500" b="1">
                 <a:solidFill>
                   <a:srgbClr val="FFFFFF"/>
                 </a:solidFill>
@@ -7330,21 +8618,21 @@
                 <a:ea typeface="Microsoft JhengHei"/>
                 <a:cs typeface="Microsoft JhengHei"/>
               </a:rPr>
-              <a:t>ChromaDB</a:t>
-            </a:r>
-          </a:p>
-        </p:txBody>
-      </p:sp>
-      <p:sp>
-        <p:nvSpPr>
-          <p:cNvPr id="14" name="TextBox 13"/>
+              <a:t>EAP 平台</a:t>
+            </a:r>
+          </a:p>
+        </p:txBody>
+      </p:sp>
+      <p:sp>
+        <p:nvSpPr>
+          <p:cNvPr id="25" name="TextBox 24"/>
           <p:cNvSpPr txBox="1"/>
           <p:nvPr/>
         </p:nvSpPr>
         <p:spPr>
           <a:xfrm>
-            <a:off x="6592824" y="3337560"/>
-            <a:ext cx="2148840" cy="1097280"/>
+            <a:off x="3703320" y="4279392"/>
+            <a:ext cx="2203704" cy="457200"/>
           </a:xfrm>
           <a:prstGeom prst="rect">
             <a:avLst/>
@@ -7359,7 +8647,7 @@
           <a:p>
             <a:pPr algn="l">
               <a:lnSpc>
-                <a:spcPct val="120000"/>
+                <a:spcPct val="110000"/>
               </a:lnSpc>
               <a:spcBef>
                 <a:spcPts val="0"/>
@@ -7369,7 +8657,7 @@
               </a:spcAft>
             </a:pPr>
             <a:r>
-              <a:rPr sz="1300" b="0">
+              <a:rPr sz="1150" b="0">
                 <a:solidFill>
                   <a:srgbClr val="E8EDF4"/>
                 </a:solidFill>
@@ -7377,21 +8665,21 @@
                 <a:ea typeface="Microsoft JhengHei"/>
                 <a:cs typeface="Microsoft JhengHei"/>
               </a:rPr>
-              <a:t>向量資料庫，語意檢索法說會段落</a:t>
-            </a:r>
-          </a:p>
-        </p:txBody>
-      </p:sp>
-      <p:sp>
-        <p:nvSpPr>
-          <p:cNvPr id="15" name="Rounded Rectangle 14"/>
+              <a:t>Hybrid RAG（Vector＋Graph）</a:t>
+            </a:r>
+          </a:p>
+        </p:txBody>
+      </p:sp>
+      <p:sp>
+        <p:nvSpPr>
+          <p:cNvPr id="26" name="Rounded Rectangle 25"/>
           <p:cNvSpPr/>
           <p:nvPr/>
         </p:nvSpPr>
         <p:spPr>
           <a:xfrm>
-            <a:off x="9226296" y="2377440"/>
-            <a:ext cx="2606040" cy="2194560"/>
+            <a:off x="6364224" y="3657600"/>
+            <a:ext cx="2606040" cy="1143000"/>
           </a:xfrm>
           <a:prstGeom prst="roundRect">
             <a:avLst>
@@ -7432,14 +8720,14 @@
       </p:sp>
       <p:sp>
         <p:nvSpPr>
-          <p:cNvPr id="16" name="TextBox 15"/>
+          <p:cNvPr id="27" name="TextBox 26"/>
           <p:cNvSpPr txBox="1"/>
           <p:nvPr/>
         </p:nvSpPr>
         <p:spPr>
           <a:xfrm>
-            <a:off x="9454896" y="2651760"/>
-            <a:ext cx="2148840" cy="548640"/>
+            <a:off x="6565392" y="3840480"/>
+            <a:ext cx="2203704" cy="457200"/>
           </a:xfrm>
           <a:prstGeom prst="rect">
             <a:avLst/>
@@ -7464,7 +8752,7 @@
               </a:spcAft>
             </a:pPr>
             <a:r>
-              <a:rPr sz="1800" b="1">
+              <a:rPr sz="1500" b="1">
                 <a:solidFill>
                   <a:srgbClr val="FFFFFF"/>
                 </a:solidFill>
@@ -7472,21 +8760,21 @@
                 <a:ea typeface="Microsoft JhengHei"/>
                 <a:cs typeface="Microsoft JhengHei"/>
               </a:rPr>
-              <a:t>python-docx</a:t>
-            </a:r>
-          </a:p>
-        </p:txBody>
-      </p:sp>
-      <p:sp>
-        <p:nvSpPr>
-          <p:cNvPr id="17" name="TextBox 16"/>
+              <a:t>ChromaDB</a:t>
+            </a:r>
+          </a:p>
+        </p:txBody>
+      </p:sp>
+      <p:sp>
+        <p:nvSpPr>
+          <p:cNvPr id="28" name="TextBox 27"/>
           <p:cNvSpPr txBox="1"/>
           <p:nvPr/>
         </p:nvSpPr>
         <p:spPr>
           <a:xfrm>
-            <a:off x="9454896" y="3337560"/>
-            <a:ext cx="2148840" cy="1097280"/>
+            <a:off x="6565392" y="4279392"/>
+            <a:ext cx="2203704" cy="457200"/>
           </a:xfrm>
           <a:prstGeom prst="rect">
             <a:avLst/>
@@ -7501,7 +8789,7 @@
           <a:p>
             <a:pPr algn="l">
               <a:lnSpc>
-                <a:spcPct val="120000"/>
+                <a:spcPct val="110000"/>
               </a:lnSpc>
               <a:spcBef>
                 <a:spcPts val="0"/>
@@ -7511,7 +8799,7 @@
               </a:spcAft>
             </a:pPr>
             <a:r>
-              <a:rPr sz="1300" b="0">
+              <a:rPr sz="1150" b="0">
                 <a:solidFill>
                   <a:srgbClr val="E8EDF4"/>
                 </a:solidFill>
@@ -7519,21 +8807,163 @@
                 <a:ea typeface="Microsoft JhengHei"/>
                 <a:cs typeface="Microsoft JhengHei"/>
               </a:rPr>
-              <a:t>自動生成 Word 分析報告</a:t>
-            </a:r>
-          </a:p>
-        </p:txBody>
-      </p:sp>
-      <p:sp>
-        <p:nvSpPr>
-          <p:cNvPr id="18" name="Rounded Rectangle 17"/>
+              <a:t>向量語意檢索</a:t>
+            </a:r>
+          </a:p>
+        </p:txBody>
+      </p:sp>
+      <p:sp>
+        <p:nvSpPr>
+          <p:cNvPr id="29" name="Rounded Rectangle 28"/>
           <p:cNvSpPr/>
           <p:nvPr/>
         </p:nvSpPr>
         <p:spPr>
           <a:xfrm>
-            <a:off x="640080" y="5029200"/>
-            <a:ext cx="10908792" cy="1234440"/>
+            <a:off x="9226296" y="3657600"/>
+            <a:ext cx="2606040" cy="1143000"/>
+          </a:xfrm>
+          <a:prstGeom prst="roundRect">
+            <a:avLst>
+              <a:gd name="adj" fmla="val 8000"/>
+            </a:avLst>
+          </a:prstGeom>
+          <a:solidFill>
+            <a:srgbClr val="2E4E7A"/>
+          </a:solidFill>
+          <a:ln w="12700">
+            <a:solidFill>
+              <a:srgbClr val="4A6692"/>
+            </a:solidFill>
+          </a:ln>
+          <a:effectLst/>
+        </p:spPr>
+        <p:style>
+          <a:lnRef idx="1">
+            <a:schemeClr val="accent1"/>
+          </a:lnRef>
+          <a:fillRef idx="3">
+            <a:schemeClr val="accent1"/>
+          </a:fillRef>
+          <a:effectRef idx="2">
+            <a:schemeClr val="accent1"/>
+          </a:effectRef>
+          <a:fontRef idx="minor">
+            <a:schemeClr val="lt1"/>
+          </a:fontRef>
+        </p:style>
+        <p:txBody>
+          <a:bodyPr rtlCol="0" anchor="ctr"/>
+          <a:lstStyle/>
+          <a:p>
+            <a:pPr algn="ctr"/>
+          </a:p>
+        </p:txBody>
+      </p:sp>
+      <p:sp>
+        <p:nvSpPr>
+          <p:cNvPr id="30" name="TextBox 29"/>
+          <p:cNvSpPr txBox="1"/>
+          <p:nvPr/>
+        </p:nvSpPr>
+        <p:spPr>
+          <a:xfrm>
+            <a:off x="9427464" y="3840480"/>
+            <a:ext cx="2203704" cy="457200"/>
+          </a:xfrm>
+          <a:prstGeom prst="rect">
+            <a:avLst/>
+          </a:prstGeom>
+          <a:noFill/>
+        </p:spPr>
+        <p:txBody>
+          <a:bodyPr wrap="square" anchor="t" lIns="0" rIns="0" tIns="0" bIns="0">
+            <a:spAutoFit/>
+          </a:bodyPr>
+          <a:lstStyle/>
+          <a:p>
+            <a:pPr algn="l">
+              <a:lnSpc>
+                <a:spcPct val="100000"/>
+              </a:lnSpc>
+              <a:spcBef>
+                <a:spcPts val="0"/>
+              </a:spcBef>
+              <a:spcAft>
+                <a:spcPts val="400"/>
+              </a:spcAft>
+            </a:pPr>
+            <a:r>
+              <a:rPr sz="1500" b="1">
+                <a:solidFill>
+                  <a:srgbClr val="FFFFFF"/>
+                </a:solidFill>
+                <a:latin typeface="Microsoft JhengHei"/>
+                <a:ea typeface="Microsoft JhengHei"/>
+                <a:cs typeface="Microsoft JhengHei"/>
+              </a:rPr>
+              <a:t>python-docx</a:t>
+            </a:r>
+          </a:p>
+        </p:txBody>
+      </p:sp>
+      <p:sp>
+        <p:nvSpPr>
+          <p:cNvPr id="31" name="TextBox 30"/>
+          <p:cNvSpPr txBox="1"/>
+          <p:nvPr/>
+        </p:nvSpPr>
+        <p:spPr>
+          <a:xfrm>
+            <a:off x="9427464" y="4279392"/>
+            <a:ext cx="2203704" cy="457200"/>
+          </a:xfrm>
+          <a:prstGeom prst="rect">
+            <a:avLst/>
+          </a:prstGeom>
+          <a:noFill/>
+        </p:spPr>
+        <p:txBody>
+          <a:bodyPr wrap="square" anchor="t" lIns="0" rIns="0" tIns="0" bIns="0">
+            <a:spAutoFit/>
+          </a:bodyPr>
+          <a:lstStyle/>
+          <a:p>
+            <a:pPr algn="l">
+              <a:lnSpc>
+                <a:spcPct val="110000"/>
+              </a:lnSpc>
+              <a:spcBef>
+                <a:spcPts val="0"/>
+              </a:spcBef>
+              <a:spcAft>
+                <a:spcPts val="400"/>
+              </a:spcAft>
+            </a:pPr>
+            <a:r>
+              <a:rPr sz="1150" b="0">
+                <a:solidFill>
+                  <a:srgbClr val="E8EDF4"/>
+                </a:solidFill>
+                <a:latin typeface="Microsoft JhengHei"/>
+                <a:ea typeface="Microsoft JhengHei"/>
+                <a:cs typeface="Microsoft JhengHei"/>
+              </a:rPr>
+              <a:t>一鍵 Word 報告</a:t>
+            </a:r>
+          </a:p>
+        </p:txBody>
+      </p:sp>
+      <p:sp>
+        <p:nvSpPr>
+          <p:cNvPr id="32" name="Rounded Rectangle 31"/>
+          <p:cNvSpPr/>
+          <p:nvPr/>
+        </p:nvSpPr>
+        <p:spPr>
+          <a:xfrm>
+            <a:off x="640080" y="5120640"/>
+            <a:ext cx="10908792" cy="1188720"/>
           </a:xfrm>
           <a:prstGeom prst="roundRect">
             <a:avLst>
@@ -7572,13 +9002,13 @@
       </p:sp>
       <p:sp>
         <p:nvSpPr>
-          <p:cNvPr id="19" name="TextBox 18"/>
+          <p:cNvPr id="33" name="TextBox 32"/>
           <p:cNvSpPr txBox="1"/>
           <p:nvPr/>
         </p:nvSpPr>
         <p:spPr>
           <a:xfrm>
-            <a:off x="914400" y="5230368"/>
+            <a:off x="914400" y="5285232"/>
             <a:ext cx="10424160" cy="914400"/>
           </a:xfrm>
           <a:prstGeom prst="rect">
@@ -7594,7 +9024,7 @@
           <a:p>
             <a:pPr algn="l">
               <a:lnSpc>
-                <a:spcPct val="125000"/>
+                <a:spcPct val="130000"/>
               </a:lnSpc>
               <a:spcBef>
                 <a:spcPts val="0"/>
@@ -7604,7 +9034,7 @@
               </a:spcAft>
             </a:pPr>
             <a:r>
-              <a:rPr sz="1600" b="1">
+              <a:rPr sz="1500" b="1">
                 <a:solidFill>
                   <a:srgbClr val="CADCFC"/>
                 </a:solidFill>
@@ -7612,10 +9042,10 @@
                 <a:ea typeface="Microsoft JhengHei"/>
                 <a:cs typeface="Microsoft JhengHei"/>
               </a:rPr>
-              <a:t>跨領域整合：</a:t>
-            </a:r>
-            <a:r>
-              <a:rPr sz="1500" b="0">
+              <a:t>已上線：</a:t>
+            </a:r>
+            <a:r>
+              <a:rPr sz="1400" b="0">
                 <a:solidFill>
                   <a:srgbClr val="FFFFFF"/>
                 </a:solidFill>
@@ -7623,13 +9053,24 @@
                 <a:ea typeface="Microsoft JhengHei"/>
                 <a:cs typeface="Microsoft JhengHei"/>
               </a:rPr>
-              <a:t>財務知識 ＋ 自然語言處理 ＋ 資料視覺化 ＋ 全端網頁——</a:t>
+              <a:t>公開網址即可使用（Render 部署）；</a:t>
+            </a:r>
+            <a:r>
+              <a:rPr sz="1400" b="0">
+                <a:solidFill>
+                  <a:srgbClr val="FFFFFF"/>
+                </a:solidFill>
+                <a:latin typeface="Microsoft JhengHei"/>
+                <a:ea typeface="Microsoft JhengHei"/>
+                <a:cs typeface="Microsoft JhengHei"/>
+              </a:rPr>
+              <a:t>Hybrid RAG Chat API 可介接投研平台／券商 App／企業 IR 工具。</a:t>
             </a:r>
           </a:p>
           <a:p>
             <a:pPr algn="l">
               <a:lnSpc>
-                <a:spcPct val="125000"/>
+                <a:spcPct val="130000"/>
               </a:lnSpc>
               <a:spcBef>
                 <a:spcPts val="0"/>
@@ -7639,22 +9080,22 @@
               </a:spcAft>
             </a:pPr>
             <a:r>
-              <a:rPr sz="1500" b="0">
-                <a:solidFill>
-                  <a:srgbClr val="FFFFFF"/>
-                </a:solidFill>
-                <a:latin typeface="Microsoft JhengHei"/>
-                <a:ea typeface="Microsoft JhengHei"/>
-                <a:cs typeface="Microsoft JhengHei"/>
-              </a:rPr>
-              <a:t>用 Vibe Coding 在短時間內把它們串成一個能跑、能 Demo、能部署的系統。</a:t>
-            </a:r>
-          </a:p>
-        </p:txBody>
-      </p:sp>
-      <p:sp>
-        <p:nvSpPr>
-          <p:cNvPr id="20" name="TextBox 19"/>
+              <a:rPr sz="1400" b="0">
+                <a:solidFill>
+                  <a:srgbClr val="E8EDF4"/>
+                </a:solidFill>
+                <a:latin typeface="Microsoft JhengHei"/>
+                <a:ea typeface="Microsoft JhengHei"/>
+                <a:cs typeface="Microsoft JhengHei"/>
+              </a:rPr>
+              <a:t>以 Vibe Coding（自然語言開發）短時間串成能跑、能 Demo、能部署的系統——具市場成熟度。</a:t>
+            </a:r>
+          </a:p>
+        </p:txBody>
+      </p:sp>
+      <p:sp>
+        <p:nvSpPr>
+          <p:cNvPr id="34" name="TextBox 33"/>
           <p:cNvSpPr txBox="1"/>
           <p:nvPr/>
         </p:nvSpPr>
@@ -7694,7 +9135,7 @@
                 <a:ea typeface="Microsoft JhengHei"/>
                 <a:cs typeface="Microsoft JhengHei"/>
               </a:rPr>
-              <a:t>14</a:t>
+              <a:t>15</a:t>
             </a:r>
           </a:p>
         </p:txBody>
@@ -7707,7 +9148,7 @@
 </p:sld>
 </file>
 
-<file path=ppt/slides/slide15.xml><?xml version="1.0" encoding="utf-8"?>
+<file path=ppt/slides/slide16.xml><?xml version="1.0" encoding="utf-8"?>
 <p:sld xmlns:a="http://schemas.openxmlformats.org/drawingml/2006/main" xmlns:p="http://schemas.openxmlformats.org/presentationml/2006/main" xmlns:r="http://schemas.openxmlformats.org/officeDocument/2006/relationships">
   <p:cSld>
     <p:bg>
@@ -8808,7 +10249,7 @@
                 <a:ea typeface="Microsoft JhengHei"/>
                 <a:cs typeface="Microsoft JhengHei"/>
               </a:rPr>
-              <a:t>15</a:t>
+              <a:t>16</a:t>
             </a:r>
           </a:p>
         </p:txBody>
@@ -8821,7 +10262,7 @@
 </p:sld>
 </file>
 
-<file path=ppt/slides/slide16.xml><?xml version="1.0" encoding="utf-8"?>
+<file path=ppt/slides/slide17.xml><?xml version="1.0" encoding="utf-8"?>
 <p:sld xmlns:a="http://schemas.openxmlformats.org/drawingml/2006/main" xmlns:p="http://schemas.openxmlformats.org/presentationml/2006/main" xmlns:r="http://schemas.openxmlformats.org/officeDocument/2006/relationships">
   <p:cSld>
     <p:bg>
@@ -11368,7 +12809,7 @@
                 <a:ea typeface="Microsoft JhengHei"/>
                 <a:cs typeface="Microsoft JhengHei"/>
               </a:rPr>
-              <a:t>DATASET INTRO</a:t>
+              <a:t>DATA SOURCE &amp; PIPELINE · 第一次諮詢重點</a:t>
             </a:r>
           </a:p>
         </p:txBody>
@@ -11415,7 +12856,7 @@
                 <a:ea typeface="Microsoft JhengHei"/>
                 <a:cs typeface="Microsoft JhengHei"/>
               </a:rPr>
-              <a:t>資料集介紹</a:t>
+              <a:t>資料來源與處理流程</a:t>
             </a:r>
           </a:p>
         </p:txBody>
@@ -11462,21 +12903,68 @@
                 <a:ea typeface="Microsoft JhengHei"/>
                 <a:cs typeface="Microsoft JhengHei"/>
               </a:rPr>
-              <a:t>為什麼選金控財報：公開、可比、痛點明確</a:t>
-            </a:r>
-          </a:p>
-        </p:txBody>
-      </p:sp>
-      <p:sp>
-        <p:nvSpPr>
-          <p:cNvPr id="5" name="Rounded Rectangle 4"/>
+              <a:t>冷數據 → 溫決策：結構化＋非結構化，全流程解析、清洗、匯入</a:t>
+            </a:r>
+          </a:p>
+        </p:txBody>
+      </p:sp>
+      <p:sp>
+        <p:nvSpPr>
+          <p:cNvPr id="5" name="TextBox 4"/>
+          <p:cNvSpPr txBox="1"/>
+          <p:nvPr/>
+        </p:nvSpPr>
+        <p:spPr>
+          <a:xfrm>
+            <a:off x="640080" y="1965960"/>
+            <a:ext cx="4937760" cy="365760"/>
+          </a:xfrm>
+          <a:prstGeom prst="rect">
+            <a:avLst/>
+          </a:prstGeom>
+          <a:noFill/>
+        </p:spPr>
+        <p:txBody>
+          <a:bodyPr wrap="square" anchor="t" lIns="0" rIns="0" tIns="0" bIns="0">
+            <a:spAutoFit/>
+          </a:bodyPr>
+          <a:lstStyle/>
+          <a:p>
+            <a:pPr algn="l">
+              <a:lnSpc>
+                <a:spcPct val="100000"/>
+              </a:lnSpc>
+              <a:spcBef>
+                <a:spcPts val="0"/>
+              </a:spcBef>
+              <a:spcAft>
+                <a:spcPts val="400"/>
+              </a:spcAft>
+            </a:pPr>
+            <a:r>
+              <a:rPr sz="1600" b="1">
+                <a:solidFill>
+                  <a:srgbClr val="6B4E9E"/>
+                </a:solidFill>
+                <a:latin typeface="Microsoft JhengHei"/>
+                <a:ea typeface="Microsoft JhengHei"/>
+                <a:cs typeface="Microsoft JhengHei"/>
+              </a:rPr>
+              <a:t>資料來源</a:t>
+            </a:r>
+          </a:p>
+        </p:txBody>
+      </p:sp>
+      <p:sp>
+        <p:nvSpPr>
+          <p:cNvPr id="6" name="Rounded Rectangle 5"/>
           <p:cNvSpPr/>
           <p:nvPr/>
         </p:nvSpPr>
         <p:spPr>
           <a:xfrm>
-            <a:off x="640080" y="1965960"/>
-            <a:ext cx="3520440" cy="1554480"/>
+            <a:off x="640080" y="2395728"/>
+            <a:ext cx="4937760" cy="1234440"/>
           </a:xfrm>
           <a:prstGeom prst="roundRect">
             <a:avLst>
@@ -11517,14 +13005,14 @@
       </p:sp>
       <p:sp>
         <p:nvSpPr>
-          <p:cNvPr id="6" name="Oval 5"/>
+          <p:cNvPr id="7" name="Oval 6"/>
           <p:cNvSpPr/>
           <p:nvPr/>
         </p:nvSpPr>
         <p:spPr>
           <a:xfrm>
-            <a:off x="960119" y="2340864"/>
-            <a:ext cx="182880" cy="182880"/>
+            <a:off x="914400" y="2724912"/>
+            <a:ext cx="164592" cy="164592"/>
           </a:xfrm>
           <a:prstGeom prst="ellipse">
             <a:avLst/>
@@ -11561,14 +13049,14 @@
       </p:sp>
       <p:sp>
         <p:nvSpPr>
-          <p:cNvPr id="7" name="TextBox 6"/>
+          <p:cNvPr id="8" name="TextBox 7"/>
           <p:cNvSpPr txBox="1"/>
           <p:nvPr/>
         </p:nvSpPr>
         <p:spPr>
           <a:xfrm>
-            <a:off x="1261872" y="2240280"/>
-            <a:ext cx="2743200" cy="457200"/>
+            <a:off x="1207008" y="2615184"/>
+            <a:ext cx="4206240" cy="365760"/>
           </a:xfrm>
           <a:prstGeom prst="rect">
             <a:avLst/>
@@ -11593,7 +13081,7 @@
               </a:spcAft>
             </a:pPr>
             <a:r>
-              <a:rPr sz="1700" b="1">
+              <a:rPr sz="1500" b="1">
                 <a:solidFill>
                   <a:srgbClr val="1E3A5F"/>
                 </a:solidFill>
@@ -11601,21 +13089,21 @@
                 <a:ea typeface="Microsoft JhengHei"/>
                 <a:cs typeface="Microsoft JhengHei"/>
               </a:rPr>
-              <a:t>財報簡報 PDF</a:t>
-            </a:r>
-          </a:p>
-        </p:txBody>
-      </p:sp>
-      <p:sp>
-        <p:nvSpPr>
-          <p:cNvPr id="8" name="TextBox 7"/>
+              <a:t>結構化資料</a:t>
+            </a:r>
+          </a:p>
+        </p:txBody>
+      </p:sp>
+      <p:sp>
+        <p:nvSpPr>
+          <p:cNvPr id="9" name="TextBox 8"/>
           <p:cNvSpPr txBox="1"/>
           <p:nvPr/>
         </p:nvSpPr>
         <p:spPr>
           <a:xfrm>
-            <a:off x="960119" y="2834640"/>
-            <a:ext cx="3063240" cy="640080"/>
+            <a:off x="914400" y="2999232"/>
+            <a:ext cx="4572000" cy="548640"/>
           </a:xfrm>
           <a:prstGeom prst="rect">
             <a:avLst/>
@@ -11640,7 +13128,7 @@
               </a:spcAft>
             </a:pPr>
             <a:r>
-              <a:rPr sz="1350" b="0">
+              <a:rPr sz="1250" b="0">
                 <a:solidFill>
                   <a:srgbClr val="434343"/>
                 </a:solidFill>
@@ -11648,21 +13136,21 @@
                 <a:ea typeface="Microsoft JhengHei"/>
                 <a:cs typeface="Microsoft JhengHei"/>
               </a:rPr>
-              <a:t>→ VLM 逐頁解析成結構化指標</a:t>
-            </a:r>
-          </a:p>
-        </p:txBody>
-      </p:sp>
-      <p:sp>
-        <p:nvSpPr>
-          <p:cNvPr id="9" name="Rounded Rectangle 8"/>
+              <a:t>公開資訊觀測站財報數字（資產／負債／EPS…）</a:t>
+            </a:r>
+          </a:p>
+        </p:txBody>
+      </p:sp>
+      <p:sp>
+        <p:nvSpPr>
+          <p:cNvPr id="10" name="Rounded Rectangle 9"/>
           <p:cNvSpPr/>
           <p:nvPr/>
         </p:nvSpPr>
         <p:spPr>
           <a:xfrm>
-            <a:off x="4480560" y="1965960"/>
-            <a:ext cx="3520440" cy="1554480"/>
+            <a:off x="640080" y="3767328"/>
+            <a:ext cx="4937760" cy="1554480"/>
           </a:xfrm>
           <a:prstGeom prst="roundRect">
             <a:avLst>
@@ -11703,14 +13191,14 @@
       </p:sp>
       <p:sp>
         <p:nvSpPr>
-          <p:cNvPr id="10" name="Oval 9"/>
+          <p:cNvPr id="11" name="Oval 10"/>
           <p:cNvSpPr/>
           <p:nvPr/>
         </p:nvSpPr>
         <p:spPr>
           <a:xfrm>
-            <a:off x="4800600" y="2340864"/>
-            <a:ext cx="182880" cy="182880"/>
+            <a:off x="914400" y="4096512"/>
+            <a:ext cx="164592" cy="164592"/>
           </a:xfrm>
           <a:prstGeom prst="ellipse">
             <a:avLst/>
@@ -11747,14 +13235,14 @@
       </p:sp>
       <p:sp>
         <p:nvSpPr>
-          <p:cNvPr id="11" name="TextBox 10"/>
+          <p:cNvPr id="12" name="TextBox 11"/>
           <p:cNvSpPr txBox="1"/>
           <p:nvPr/>
         </p:nvSpPr>
         <p:spPr>
           <a:xfrm>
-            <a:off x="5102352" y="2240280"/>
-            <a:ext cx="2743200" cy="457200"/>
+            <a:off x="1207008" y="3986784"/>
+            <a:ext cx="4206240" cy="365760"/>
           </a:xfrm>
           <a:prstGeom prst="rect">
             <a:avLst/>
@@ -11779,7 +13267,7 @@
               </a:spcAft>
             </a:pPr>
             <a:r>
-              <a:rPr sz="1700" b="1">
+              <a:rPr sz="1500" b="1">
                 <a:solidFill>
                   <a:srgbClr val="6B4E9E"/>
                 </a:solidFill>
@@ -11787,21 +13275,21 @@
                 <a:ea typeface="Microsoft JhengHei"/>
                 <a:cs typeface="Microsoft JhengHei"/>
               </a:rPr>
-              <a:t>法說會錄音</a:t>
-            </a:r>
-          </a:p>
-        </p:txBody>
-      </p:sp>
-      <p:sp>
-        <p:nvSpPr>
-          <p:cNvPr id="12" name="TextBox 11"/>
+              <a:t>非結構化資料</a:t>
+            </a:r>
+          </a:p>
+        </p:txBody>
+      </p:sp>
+      <p:sp>
+        <p:nvSpPr>
+          <p:cNvPr id="13" name="TextBox 12"/>
           <p:cNvSpPr txBox="1"/>
           <p:nvPr/>
         </p:nvSpPr>
         <p:spPr>
           <a:xfrm>
-            <a:off x="4800600" y="2834640"/>
-            <a:ext cx="3063240" cy="640080"/>
+            <a:off x="914400" y="4370832"/>
+            <a:ext cx="4572000" cy="914400"/>
           </a:xfrm>
           <a:prstGeom prst="rect">
             <a:avLst/>
@@ -11826,7 +13314,7 @@
               </a:spcAft>
             </a:pPr>
             <a:r>
-              <a:rPr sz="1350" b="0">
+              <a:rPr sz="1250" b="0">
                 <a:solidFill>
                   <a:srgbClr val="434343"/>
                 </a:solidFill>
@@ -11834,21 +13322,92 @@
                 <a:ea typeface="Microsoft JhengHei"/>
                 <a:cs typeface="Microsoft JhengHei"/>
               </a:rPr>
-              <a:t>→ STT 轉逐字稿 → 語意索引</a:t>
-            </a:r>
-          </a:p>
-        </p:txBody>
-      </p:sp>
-      <p:sp>
-        <p:nvSpPr>
-          <p:cNvPr id="13" name="Rounded Rectangle 12"/>
+              <a:t>· 簡報 PDF → VLM 視覺解析成指標</a:t>
+            </a:r>
+          </a:p>
+          <a:p>
+            <a:pPr algn="l">
+              <a:lnSpc>
+                <a:spcPct val="110000"/>
+              </a:lnSpc>
+              <a:spcBef>
+                <a:spcPts val="0"/>
+              </a:spcBef>
+              <a:spcAft>
+                <a:spcPts val="400"/>
+              </a:spcAft>
+            </a:pPr>
+            <a:r>
+              <a:rPr sz="1250" b="0">
+                <a:solidFill>
+                  <a:srgbClr val="434343"/>
+                </a:solidFill>
+                <a:latin typeface="Microsoft JhengHei"/>
+                <a:ea typeface="Microsoft JhengHei"/>
+                <a:cs typeface="Microsoft JhengHei"/>
+              </a:rPr>
+              <a:t>· 法說會錄音 → STT 轉逐字稿</a:t>
+            </a:r>
+          </a:p>
+        </p:txBody>
+      </p:sp>
+      <p:sp>
+        <p:nvSpPr>
+          <p:cNvPr id="14" name="TextBox 13"/>
+          <p:cNvSpPr txBox="1"/>
+          <p:nvPr/>
+        </p:nvSpPr>
+        <p:spPr>
+          <a:xfrm>
+            <a:off x="5852160" y="1965960"/>
+            <a:ext cx="5669280" cy="365760"/>
+          </a:xfrm>
+          <a:prstGeom prst="rect">
+            <a:avLst/>
+          </a:prstGeom>
+          <a:noFill/>
+        </p:spPr>
+        <p:txBody>
+          <a:bodyPr wrap="square" anchor="t" lIns="0" rIns="0" tIns="0" bIns="0">
+            <a:spAutoFit/>
+          </a:bodyPr>
+          <a:lstStyle/>
+          <a:p>
+            <a:pPr algn="l">
+              <a:lnSpc>
+                <a:spcPct val="100000"/>
+              </a:lnSpc>
+              <a:spcBef>
+                <a:spcPts val="0"/>
+              </a:spcBef>
+              <a:spcAft>
+                <a:spcPts val="400"/>
+              </a:spcAft>
+            </a:pPr>
+            <a:r>
+              <a:rPr sz="1600" b="1">
+                <a:solidFill>
+                  <a:srgbClr val="1E3A5F"/>
+                </a:solidFill>
+                <a:latin typeface="Microsoft JhengHei"/>
+                <a:ea typeface="Microsoft JhengHei"/>
+                <a:cs typeface="Microsoft JhengHei"/>
+              </a:rPr>
+              <a:t>處理流程</a:t>
+            </a:r>
+          </a:p>
+        </p:txBody>
+      </p:sp>
+      <p:sp>
+        <p:nvSpPr>
+          <p:cNvPr id="15" name="Rounded Rectangle 14"/>
           <p:cNvSpPr/>
           <p:nvPr/>
         </p:nvSpPr>
         <p:spPr>
           <a:xfrm>
-            <a:off x="8321040" y="1965960"/>
-            <a:ext cx="3520440" cy="1554480"/>
+            <a:off x="5852160" y="2395728"/>
+            <a:ext cx="5696712" cy="658368"/>
           </a:xfrm>
           <a:prstGeom prst="roundRect">
             <a:avLst>
@@ -11856,7 +13415,7 @@
             </a:avLst>
           </a:prstGeom>
           <a:solidFill>
-            <a:srgbClr val="F7F9FB"/>
+            <a:srgbClr val="E8EDF4"/>
           </a:solidFill>
           <a:ln w="12700">
             <a:solidFill>
@@ -11889,58 +13448,14 @@
       </p:sp>
       <p:sp>
         <p:nvSpPr>
-          <p:cNvPr id="14" name="Oval 13"/>
-          <p:cNvSpPr/>
-          <p:nvPr/>
-        </p:nvSpPr>
-        <p:spPr>
-          <a:xfrm>
-            <a:off x="8641080" y="2340864"/>
-            <a:ext cx="182880" cy="182880"/>
-          </a:xfrm>
-          <a:prstGeom prst="ellipse">
-            <a:avLst/>
-          </a:prstGeom>
-          <a:solidFill>
-            <a:srgbClr val="2E4E7A"/>
-          </a:solidFill>
-          <a:ln>
-            <a:noFill/>
-          </a:ln>
-          <a:effectLst/>
-        </p:spPr>
-        <p:style>
-          <a:lnRef idx="1">
-            <a:schemeClr val="accent1"/>
-          </a:lnRef>
-          <a:fillRef idx="3">
-            <a:schemeClr val="accent1"/>
-          </a:fillRef>
-          <a:effectRef idx="2">
-            <a:schemeClr val="accent1"/>
-          </a:effectRef>
-          <a:fontRef idx="minor">
-            <a:schemeClr val="lt1"/>
-          </a:fontRef>
-        </p:style>
-        <p:txBody>
-          <a:bodyPr rtlCol="0" anchor="ctr"/>
-          <a:lstStyle/>
-          <a:p>
-            <a:pPr algn="ctr"/>
-          </a:p>
-        </p:txBody>
-      </p:sp>
-      <p:sp>
-        <p:nvSpPr>
-          <p:cNvPr id="15" name="TextBox 14"/>
+          <p:cNvPr id="16" name="TextBox 15"/>
           <p:cNvSpPr txBox="1"/>
           <p:nvPr/>
         </p:nvSpPr>
         <p:spPr>
           <a:xfrm>
-            <a:off x="8942832" y="2240280"/>
-            <a:ext cx="2743200" cy="457200"/>
+            <a:off x="6053328" y="2441448"/>
+            <a:ext cx="1097280" cy="548640"/>
           </a:xfrm>
           <a:prstGeom prst="rect">
             <a:avLst/>
@@ -11948,7 +13463,7 @@
           <a:noFill/>
         </p:spPr>
         <p:txBody>
-          <a:bodyPr wrap="square" anchor="t" lIns="0" rIns="0" tIns="0" bIns="0">
+          <a:bodyPr wrap="square" anchor="ctr" lIns="0" rIns="0" tIns="0" bIns="0">
             <a:spAutoFit/>
           </a:bodyPr>
           <a:lstStyle/>
@@ -11965,29 +13480,29 @@
               </a:spcAft>
             </a:pPr>
             <a:r>
-              <a:rPr sz="1700" b="1">
-                <a:solidFill>
-                  <a:srgbClr val="2E4E7A"/>
-                </a:solidFill>
-                <a:latin typeface="Microsoft JhengHei"/>
-                <a:ea typeface="Microsoft JhengHei"/>
-                <a:cs typeface="Microsoft JhengHei"/>
-              </a:rPr>
-              <a:t>公開資訊觀測站</a:t>
-            </a:r>
-          </a:p>
-        </p:txBody>
-      </p:sp>
-      <p:sp>
-        <p:nvSpPr>
-          <p:cNvPr id="16" name="TextBox 15"/>
+              <a:rPr sz="1500" b="1">
+                <a:solidFill>
+                  <a:srgbClr val="1E3A5F"/>
+                </a:solidFill>
+                <a:latin typeface="Microsoft JhengHei"/>
+                <a:ea typeface="Microsoft JhengHei"/>
+                <a:cs typeface="Microsoft JhengHei"/>
+              </a:rPr>
+              <a:t>① 取得</a:t>
+            </a:r>
+          </a:p>
+        </p:txBody>
+      </p:sp>
+      <p:sp>
+        <p:nvSpPr>
+          <p:cNvPr id="17" name="TextBox 16"/>
           <p:cNvSpPr txBox="1"/>
           <p:nvPr/>
         </p:nvSpPr>
         <p:spPr>
           <a:xfrm>
-            <a:off x="8641080" y="2834640"/>
-            <a:ext cx="3063240" cy="640080"/>
+            <a:off x="7086600" y="2441448"/>
+            <a:ext cx="4297680" cy="548640"/>
           </a:xfrm>
           <a:prstGeom prst="rect">
             <a:avLst/>
@@ -11995,14 +13510,14 @@
           <a:noFill/>
         </p:spPr>
         <p:txBody>
-          <a:bodyPr wrap="square" anchor="t" lIns="0" rIns="0" tIns="0" bIns="0">
+          <a:bodyPr wrap="square" anchor="ctr" lIns="0" rIns="0" tIns="0" bIns="0">
             <a:spAutoFit/>
           </a:bodyPr>
           <a:lstStyle/>
           <a:p>
             <a:pPr algn="l">
               <a:lnSpc>
-                <a:spcPct val="110000"/>
+                <a:spcPct val="100000"/>
               </a:lnSpc>
               <a:spcBef>
                 <a:spcPts val="0"/>
@@ -12012,7 +13527,7 @@
               </a:spcAft>
             </a:pPr>
             <a:r>
-              <a:rPr sz="1350" b="0">
+              <a:rPr sz="1250" b="0">
                 <a:solidFill>
                   <a:srgbClr val="434343"/>
                 </a:solidFill>
@@ -12020,21 +13535,21 @@
                 <a:ea typeface="Microsoft JhengHei"/>
                 <a:cs typeface="Microsoft JhengHei"/>
               </a:rPr>
-              <a:t>→ 財務報表數字（資產／負債／EPS）</a:t>
-            </a:r>
-          </a:p>
-        </p:txBody>
-      </p:sp>
-      <p:sp>
-        <p:nvSpPr>
-          <p:cNvPr id="17" name="Rounded Rectangle 16"/>
+              <a:t>PDF／錄音／公開財報</a:t>
+            </a:r>
+          </a:p>
+        </p:txBody>
+      </p:sp>
+      <p:sp>
+        <p:nvSpPr>
+          <p:cNvPr id="18" name="Rounded Rectangle 17"/>
           <p:cNvSpPr/>
           <p:nvPr/>
         </p:nvSpPr>
         <p:spPr>
           <a:xfrm>
-            <a:off x="640080" y="3977639"/>
-            <a:ext cx="2514600" cy="1417320"/>
+            <a:off x="5852160" y="3127248"/>
+            <a:ext cx="5696712" cy="658368"/>
           </a:xfrm>
           <a:prstGeom prst="roundRect">
             <a:avLst>
@@ -12075,14 +13590,14 @@
       </p:sp>
       <p:sp>
         <p:nvSpPr>
-          <p:cNvPr id="18" name="TextBox 17"/>
+          <p:cNvPr id="19" name="TextBox 18"/>
           <p:cNvSpPr txBox="1"/>
           <p:nvPr/>
         </p:nvSpPr>
         <p:spPr>
           <a:xfrm>
-            <a:off x="640080" y="4160520"/>
-            <a:ext cx="2514600" cy="822960"/>
+            <a:off x="6053328" y="3172968"/>
+            <a:ext cx="1097280" cy="548640"/>
           </a:xfrm>
           <a:prstGeom prst="rect">
             <a:avLst/>
@@ -12090,12 +13605,12 @@
           <a:noFill/>
         </p:spPr>
         <p:txBody>
-          <a:bodyPr wrap="square" anchor="t" lIns="0" rIns="0" tIns="0" bIns="0">
+          <a:bodyPr wrap="square" anchor="ctr" lIns="0" rIns="0" tIns="0" bIns="0">
             <a:spAutoFit/>
           </a:bodyPr>
           <a:lstStyle/>
           <a:p>
-            <a:pPr algn="ctr">
+            <a:pPr algn="l">
               <a:lnSpc>
                 <a:spcPct val="100000"/>
               </a:lnSpc>
@@ -12107,7 +13622,7 @@
               </a:spcAft>
             </a:pPr>
             <a:r>
-              <a:rPr sz="4200" b="1">
+              <a:rPr sz="1500" b="1">
                 <a:solidFill>
                   <a:srgbClr val="1E3A5F"/>
                 </a:solidFill>
@@ -12115,21 +13630,21 @@
                 <a:ea typeface="Microsoft JhengHei"/>
                 <a:cs typeface="Microsoft JhengHei"/>
               </a:rPr>
-              <a:t>4</a:t>
-            </a:r>
-          </a:p>
-        </p:txBody>
-      </p:sp>
-      <p:sp>
-        <p:nvSpPr>
-          <p:cNvPr id="19" name="TextBox 18"/>
+              <a:t>② 解析</a:t>
+            </a:r>
+          </a:p>
+        </p:txBody>
+      </p:sp>
+      <p:sp>
+        <p:nvSpPr>
+          <p:cNvPr id="20" name="TextBox 19"/>
           <p:cNvSpPr txBox="1"/>
           <p:nvPr/>
         </p:nvSpPr>
         <p:spPr>
           <a:xfrm>
-            <a:off x="640080" y="4956048"/>
-            <a:ext cx="2514600" cy="365760"/>
+            <a:off x="7086600" y="3172968"/>
+            <a:ext cx="4297680" cy="548640"/>
           </a:xfrm>
           <a:prstGeom prst="rect">
             <a:avLst/>
@@ -12137,12 +13652,12 @@
           <a:noFill/>
         </p:spPr>
         <p:txBody>
-          <a:bodyPr wrap="square" anchor="t" lIns="0" rIns="0" tIns="0" bIns="0">
+          <a:bodyPr wrap="square" anchor="ctr" lIns="0" rIns="0" tIns="0" bIns="0">
             <a:spAutoFit/>
           </a:bodyPr>
           <a:lstStyle/>
           <a:p>
-            <a:pPr algn="ctr">
+            <a:pPr algn="l">
               <a:lnSpc>
                 <a:spcPct val="100000"/>
               </a:lnSpc>
@@ -12154,29 +13669,171 @@
               </a:spcAft>
             </a:pPr>
             <a:r>
-              <a:rPr sz="1400" b="1">
-                <a:solidFill>
-                  <a:srgbClr val="767C87"/>
-                </a:solidFill>
-                <a:latin typeface="Microsoft JhengHei"/>
-                <a:ea typeface="Microsoft JhengHei"/>
-                <a:cs typeface="Microsoft JhengHei"/>
-              </a:rPr>
-              <a:t>金控機構</a:t>
-            </a:r>
-          </a:p>
-        </p:txBody>
-      </p:sp>
-      <p:sp>
-        <p:nvSpPr>
-          <p:cNvPr id="20" name="Rounded Rectangle 19"/>
+              <a:rPr sz="1250" b="0">
+                <a:solidFill>
+                  <a:srgbClr val="434343"/>
+                </a:solidFill>
+                <a:latin typeface="Microsoft JhengHei"/>
+                <a:ea typeface="Microsoft JhengHei"/>
+                <a:cs typeface="Microsoft JhengHei"/>
+              </a:rPr>
+              <a:t>VLM 讀圖成指標、STT 轉文字</a:t>
+            </a:r>
+          </a:p>
+        </p:txBody>
+      </p:sp>
+      <p:sp>
+        <p:nvSpPr>
+          <p:cNvPr id="21" name="Rounded Rectangle 20"/>
           <p:cNvSpPr/>
           <p:nvPr/>
         </p:nvSpPr>
         <p:spPr>
           <a:xfrm>
-            <a:off x="3410712" y="3977639"/>
-            <a:ext cx="2514600" cy="1417320"/>
+            <a:off x="5852160" y="3858768"/>
+            <a:ext cx="5696712" cy="658368"/>
+          </a:xfrm>
+          <a:prstGeom prst="roundRect">
+            <a:avLst>
+              <a:gd name="adj" fmla="val 8000"/>
+            </a:avLst>
+          </a:prstGeom>
+          <a:solidFill>
+            <a:srgbClr val="E8EDF4"/>
+          </a:solidFill>
+          <a:ln w="12700">
+            <a:solidFill>
+              <a:srgbClr val="D8DEE6"/>
+            </a:solidFill>
+          </a:ln>
+          <a:effectLst/>
+        </p:spPr>
+        <p:style>
+          <a:lnRef idx="1">
+            <a:schemeClr val="accent1"/>
+          </a:lnRef>
+          <a:fillRef idx="3">
+            <a:schemeClr val="accent1"/>
+          </a:fillRef>
+          <a:effectRef idx="2">
+            <a:schemeClr val="accent1"/>
+          </a:effectRef>
+          <a:fontRef idx="minor">
+            <a:schemeClr val="lt1"/>
+          </a:fontRef>
+        </p:style>
+        <p:txBody>
+          <a:bodyPr rtlCol="0" anchor="ctr"/>
+          <a:lstStyle/>
+          <a:p>
+            <a:pPr algn="ctr"/>
+          </a:p>
+        </p:txBody>
+      </p:sp>
+      <p:sp>
+        <p:nvSpPr>
+          <p:cNvPr id="22" name="TextBox 21"/>
+          <p:cNvSpPr txBox="1"/>
+          <p:nvPr/>
+        </p:nvSpPr>
+        <p:spPr>
+          <a:xfrm>
+            <a:off x="6053328" y="3904487"/>
+            <a:ext cx="1097280" cy="548640"/>
+          </a:xfrm>
+          <a:prstGeom prst="rect">
+            <a:avLst/>
+          </a:prstGeom>
+          <a:noFill/>
+        </p:spPr>
+        <p:txBody>
+          <a:bodyPr wrap="square" anchor="ctr" lIns="0" rIns="0" tIns="0" bIns="0">
+            <a:spAutoFit/>
+          </a:bodyPr>
+          <a:lstStyle/>
+          <a:p>
+            <a:pPr algn="l">
+              <a:lnSpc>
+                <a:spcPct val="100000"/>
+              </a:lnSpc>
+              <a:spcBef>
+                <a:spcPts val="0"/>
+              </a:spcBef>
+              <a:spcAft>
+                <a:spcPts val="400"/>
+              </a:spcAft>
+            </a:pPr>
+            <a:r>
+              <a:rPr sz="1500" b="1">
+                <a:solidFill>
+                  <a:srgbClr val="1E3A5F"/>
+                </a:solidFill>
+                <a:latin typeface="Microsoft JhengHei"/>
+                <a:ea typeface="Microsoft JhengHei"/>
+                <a:cs typeface="Microsoft JhengHei"/>
+              </a:rPr>
+              <a:t>③ 清洗</a:t>
+            </a:r>
+          </a:p>
+        </p:txBody>
+      </p:sp>
+      <p:sp>
+        <p:nvSpPr>
+          <p:cNvPr id="23" name="TextBox 22"/>
+          <p:cNvSpPr txBox="1"/>
+          <p:nvPr/>
+        </p:nvSpPr>
+        <p:spPr>
+          <a:xfrm>
+            <a:off x="7086600" y="3904487"/>
+            <a:ext cx="4297680" cy="548640"/>
+          </a:xfrm>
+          <a:prstGeom prst="rect">
+            <a:avLst/>
+          </a:prstGeom>
+          <a:noFill/>
+        </p:spPr>
+        <p:txBody>
+          <a:bodyPr wrap="square" anchor="ctr" lIns="0" rIns="0" tIns="0" bIns="0">
+            <a:spAutoFit/>
+          </a:bodyPr>
+          <a:lstStyle/>
+          <a:p>
+            <a:pPr algn="l">
+              <a:lnSpc>
+                <a:spcPct val="100000"/>
+              </a:lnSpc>
+              <a:spcBef>
+                <a:spcPts val="0"/>
+              </a:spcBef>
+              <a:spcAft>
+                <a:spcPts val="400"/>
+              </a:spcAft>
+            </a:pPr>
+            <a:r>
+              <a:rPr sz="1250" b="0">
+                <a:solidFill>
+                  <a:srgbClr val="434343"/>
+                </a:solidFill>
+                <a:latin typeface="Microsoft JhengHei"/>
+                <a:ea typeface="Microsoft JhengHei"/>
+                <a:cs typeface="Microsoft JhengHei"/>
+              </a:rPr>
+              <a:t>切段、去雜訊、統一單位、標記累計、術語對齊</a:t>
+            </a:r>
+          </a:p>
+        </p:txBody>
+      </p:sp>
+      <p:sp>
+        <p:nvSpPr>
+          <p:cNvPr id="24" name="Rounded Rectangle 23"/>
+          <p:cNvSpPr/>
+          <p:nvPr/>
+        </p:nvSpPr>
+        <p:spPr>
+          <a:xfrm>
+            <a:off x="5852160" y="4590288"/>
+            <a:ext cx="5696712" cy="658368"/>
           </a:xfrm>
           <a:prstGeom prst="roundRect">
             <a:avLst>
@@ -12217,14 +13874,14 @@
       </p:sp>
       <p:sp>
         <p:nvSpPr>
-          <p:cNvPr id="21" name="TextBox 20"/>
+          <p:cNvPr id="25" name="TextBox 24"/>
           <p:cNvSpPr txBox="1"/>
           <p:nvPr/>
         </p:nvSpPr>
         <p:spPr>
           <a:xfrm>
-            <a:off x="3410712" y="4160520"/>
-            <a:ext cx="2514600" cy="822960"/>
+            <a:off x="6053328" y="4636007"/>
+            <a:ext cx="1097280" cy="548640"/>
           </a:xfrm>
           <a:prstGeom prst="rect">
             <a:avLst/>
@@ -12232,12 +13889,12 @@
           <a:noFill/>
         </p:spPr>
         <p:txBody>
-          <a:bodyPr wrap="square" anchor="t" lIns="0" rIns="0" tIns="0" bIns="0">
+          <a:bodyPr wrap="square" anchor="ctr" lIns="0" rIns="0" tIns="0" bIns="0">
             <a:spAutoFit/>
           </a:bodyPr>
           <a:lstStyle/>
           <a:p>
-            <a:pPr algn="ctr">
+            <a:pPr algn="l">
               <a:lnSpc>
                 <a:spcPct val="100000"/>
               </a:lnSpc>
@@ -12249,7 +13906,7 @@
               </a:spcAft>
             </a:pPr>
             <a:r>
-              <a:rPr sz="4200" b="1">
+              <a:rPr sz="1500" b="1">
                 <a:solidFill>
                   <a:srgbClr val="1E3A5F"/>
                 </a:solidFill>
@@ -12257,21 +13914,21 @@
                 <a:ea typeface="Microsoft JhengHei"/>
                 <a:cs typeface="Microsoft JhengHei"/>
               </a:rPr>
-              <a:t>6</a:t>
-            </a:r>
-          </a:p>
-        </p:txBody>
-      </p:sp>
-      <p:sp>
-        <p:nvSpPr>
-          <p:cNvPr id="22" name="TextBox 21"/>
+              <a:t>④ 匯入</a:t>
+            </a:r>
+          </a:p>
+        </p:txBody>
+      </p:sp>
+      <p:sp>
+        <p:nvSpPr>
+          <p:cNvPr id="26" name="TextBox 25"/>
           <p:cNvSpPr txBox="1"/>
           <p:nvPr/>
         </p:nvSpPr>
         <p:spPr>
           <a:xfrm>
-            <a:off x="3410712" y="4956048"/>
-            <a:ext cx="2514600" cy="365760"/>
+            <a:off x="7086600" y="4636007"/>
+            <a:ext cx="4297680" cy="548640"/>
           </a:xfrm>
           <a:prstGeom prst="rect">
             <a:avLst/>
@@ -12279,12 +13936,12 @@
           <a:noFill/>
         </p:spPr>
         <p:txBody>
-          <a:bodyPr wrap="square" anchor="t" lIns="0" rIns="0" tIns="0" bIns="0">
+          <a:bodyPr wrap="square" anchor="ctr" lIns="0" rIns="0" tIns="0" bIns="0">
             <a:spAutoFit/>
           </a:bodyPr>
           <a:lstStyle/>
           <a:p>
-            <a:pPr algn="ctr">
+            <a:pPr algn="l">
               <a:lnSpc>
                 <a:spcPct val="100000"/>
               </a:lnSpc>
@@ -12296,29 +13953,29 @@
               </a:spcAft>
             </a:pPr>
             <a:r>
-              <a:rPr sz="1400" b="1">
-                <a:solidFill>
-                  <a:srgbClr val="767C87"/>
-                </a:solidFill>
-                <a:latin typeface="Microsoft JhengHei"/>
-                <a:ea typeface="Microsoft JhengHei"/>
-                <a:cs typeface="Microsoft JhengHei"/>
-              </a:rPr>
-              <a:t>期間季度</a:t>
-            </a:r>
-          </a:p>
-        </p:txBody>
-      </p:sp>
-      <p:sp>
-        <p:nvSpPr>
-          <p:cNvPr id="23" name="Rounded Rectangle 22"/>
+              <a:rPr sz="1250" b="0">
+                <a:solidFill>
+                  <a:srgbClr val="434343"/>
+                </a:solidFill>
+                <a:latin typeface="Microsoft JhengHei"/>
+                <a:ea typeface="Microsoft JhengHei"/>
+                <a:cs typeface="Microsoft JhengHei"/>
+              </a:rPr>
+              <a:t>Graph RAG 指標庫 ＋ Vector RAG 語意庫</a:t>
+            </a:r>
+          </a:p>
+        </p:txBody>
+      </p:sp>
+      <p:sp>
+        <p:nvSpPr>
+          <p:cNvPr id="27" name="Rounded Rectangle 26"/>
           <p:cNvSpPr/>
           <p:nvPr/>
         </p:nvSpPr>
         <p:spPr>
           <a:xfrm>
-            <a:off x="6181344" y="3977639"/>
-            <a:ext cx="2514600" cy="1417320"/>
+            <a:off x="640080" y="5623560"/>
+            <a:ext cx="1298448" cy="868680"/>
           </a:xfrm>
           <a:prstGeom prst="roundRect">
             <a:avLst>
@@ -12326,12 +13983,10 @@
             </a:avLst>
           </a:prstGeom>
           <a:solidFill>
-            <a:srgbClr val="FFFFFF"/>
+            <a:srgbClr val="1E3A5F"/>
           </a:solidFill>
-          <a:ln w="12700">
-            <a:solidFill>
-              <a:srgbClr val="D8DEE6"/>
-            </a:solidFill>
+          <a:ln>
+            <a:noFill/>
           </a:ln>
           <a:effectLst/>
         </p:spPr>
@@ -12359,14 +14014,14 @@
       </p:sp>
       <p:sp>
         <p:nvSpPr>
-          <p:cNvPr id="24" name="TextBox 23"/>
+          <p:cNvPr id="28" name="TextBox 27"/>
           <p:cNvSpPr txBox="1"/>
           <p:nvPr/>
         </p:nvSpPr>
         <p:spPr>
           <a:xfrm>
-            <a:off x="6181344" y="4160520"/>
-            <a:ext cx="2514600" cy="822960"/>
+            <a:off x="640080" y="5705856"/>
+            <a:ext cx="1298448" cy="502920"/>
           </a:xfrm>
           <a:prstGeom prst="rect">
             <a:avLst/>
@@ -12391,29 +14046,29 @@
               </a:spcAft>
             </a:pPr>
             <a:r>
-              <a:rPr sz="4200" b="1">
-                <a:solidFill>
-                  <a:srgbClr val="1E3A5F"/>
-                </a:solidFill>
-                <a:latin typeface="Microsoft JhengHei"/>
-                <a:ea typeface="Microsoft JhengHei"/>
-                <a:cs typeface="Microsoft JhengHei"/>
-              </a:rPr>
-              <a:t>1,104</a:t>
-            </a:r>
-          </a:p>
-        </p:txBody>
-      </p:sp>
-      <p:sp>
-        <p:nvSpPr>
-          <p:cNvPr id="25" name="TextBox 24"/>
+              <a:rPr sz="2400" b="1">
+                <a:solidFill>
+                  <a:srgbClr val="FFFFFF"/>
+                </a:solidFill>
+                <a:latin typeface="Microsoft JhengHei"/>
+                <a:ea typeface="Microsoft JhengHei"/>
+                <a:cs typeface="Microsoft JhengHei"/>
+              </a:rPr>
+              <a:t>4</a:t>
+            </a:r>
+          </a:p>
+        </p:txBody>
+      </p:sp>
+      <p:sp>
+        <p:nvSpPr>
+          <p:cNvPr id="29" name="TextBox 28"/>
           <p:cNvSpPr txBox="1"/>
           <p:nvPr/>
         </p:nvSpPr>
         <p:spPr>
           <a:xfrm>
-            <a:off x="6181344" y="4956048"/>
-            <a:ext cx="2514600" cy="365760"/>
+            <a:off x="640080" y="6199632"/>
+            <a:ext cx="1298448" cy="274320"/>
           </a:xfrm>
           <a:prstGeom prst="rect">
             <a:avLst/>
@@ -12438,29 +14093,29 @@
               </a:spcAft>
             </a:pPr>
             <a:r>
-              <a:rPr sz="1400" b="1">
-                <a:solidFill>
-                  <a:srgbClr val="767C87"/>
-                </a:solidFill>
-                <a:latin typeface="Microsoft JhengHei"/>
-                <a:ea typeface="Microsoft JhengHei"/>
-                <a:cs typeface="Microsoft JhengHei"/>
-              </a:rPr>
-              <a:t>結構化指標</a:t>
-            </a:r>
-          </a:p>
-        </p:txBody>
-      </p:sp>
-      <p:sp>
-        <p:nvSpPr>
-          <p:cNvPr id="26" name="Rounded Rectangle 25"/>
+              <a:rPr sz="1100" b="0">
+                <a:solidFill>
+                  <a:srgbClr val="E8EDF4"/>
+                </a:solidFill>
+                <a:latin typeface="Microsoft JhengHei"/>
+                <a:ea typeface="Microsoft JhengHei"/>
+                <a:cs typeface="Microsoft JhengHei"/>
+              </a:rPr>
+              <a:t>金控</a:t>
+            </a:r>
+          </a:p>
+        </p:txBody>
+      </p:sp>
+      <p:sp>
+        <p:nvSpPr>
+          <p:cNvPr id="30" name="Rounded Rectangle 29"/>
           <p:cNvSpPr/>
           <p:nvPr/>
         </p:nvSpPr>
         <p:spPr>
           <a:xfrm>
-            <a:off x="8951976" y="3977639"/>
-            <a:ext cx="2514600" cy="1417320"/>
+            <a:off x="2084831" y="5623560"/>
+            <a:ext cx="1298448" cy="868680"/>
           </a:xfrm>
           <a:prstGeom prst="roundRect">
             <a:avLst>
@@ -12468,12 +14123,10 @@
             </a:avLst>
           </a:prstGeom>
           <a:solidFill>
-            <a:srgbClr val="FFFFFF"/>
+            <a:srgbClr val="1E3A5F"/>
           </a:solidFill>
-          <a:ln w="12700">
-            <a:solidFill>
-              <a:srgbClr val="D8DEE6"/>
-            </a:solidFill>
+          <a:ln>
+            <a:noFill/>
           </a:ln>
           <a:effectLst/>
         </p:spPr>
@@ -12501,14 +14154,14 @@
       </p:sp>
       <p:sp>
         <p:nvSpPr>
-          <p:cNvPr id="27" name="TextBox 26"/>
+          <p:cNvPr id="31" name="TextBox 30"/>
           <p:cNvSpPr txBox="1"/>
           <p:nvPr/>
         </p:nvSpPr>
         <p:spPr>
           <a:xfrm>
-            <a:off x="8951976" y="4160520"/>
-            <a:ext cx="2514600" cy="822960"/>
+            <a:off x="2084831" y="5705856"/>
+            <a:ext cx="1298448" cy="502920"/>
           </a:xfrm>
           <a:prstGeom prst="rect">
             <a:avLst/>
@@ -12533,29 +14186,29 @@
               </a:spcAft>
             </a:pPr>
             <a:r>
-              <a:rPr sz="4200" b="1">
-                <a:solidFill>
-                  <a:srgbClr val="1E3A5F"/>
-                </a:solidFill>
-                <a:latin typeface="Microsoft JhengHei"/>
-                <a:ea typeface="Microsoft JhengHei"/>
-                <a:cs typeface="Microsoft JhengHei"/>
-              </a:rPr>
-              <a:t>313</a:t>
-            </a:r>
-          </a:p>
-        </p:txBody>
-      </p:sp>
-      <p:sp>
-        <p:nvSpPr>
-          <p:cNvPr id="28" name="TextBox 27"/>
+              <a:rPr sz="2400" b="1">
+                <a:solidFill>
+                  <a:srgbClr val="FFFFFF"/>
+                </a:solidFill>
+                <a:latin typeface="Microsoft JhengHei"/>
+                <a:ea typeface="Microsoft JhengHei"/>
+                <a:cs typeface="Microsoft JhengHei"/>
+              </a:rPr>
+              <a:t>6</a:t>
+            </a:r>
+          </a:p>
+        </p:txBody>
+      </p:sp>
+      <p:sp>
+        <p:nvSpPr>
+          <p:cNvPr id="32" name="TextBox 31"/>
           <p:cNvSpPr txBox="1"/>
           <p:nvPr/>
         </p:nvSpPr>
         <p:spPr>
           <a:xfrm>
-            <a:off x="8951976" y="4956048"/>
-            <a:ext cx="2514600" cy="365760"/>
+            <a:off x="2084831" y="6199632"/>
+            <a:ext cx="1298448" cy="274320"/>
           </a:xfrm>
           <a:prstGeom prst="rect">
             <a:avLst/>
@@ -12580,29 +14233,75 @@
               </a:spcAft>
             </a:pPr>
             <a:r>
-              <a:rPr sz="1400" b="1">
-                <a:solidFill>
-                  <a:srgbClr val="767C87"/>
-                </a:solidFill>
-                <a:latin typeface="Microsoft JhengHei"/>
-                <a:ea typeface="Microsoft JhengHei"/>
-                <a:cs typeface="Microsoft JhengHei"/>
-              </a:rPr>
-              <a:t>語意段落</a:t>
-            </a:r>
-          </a:p>
-        </p:txBody>
-      </p:sp>
-      <p:sp>
-        <p:nvSpPr>
-          <p:cNvPr id="29" name="TextBox 28"/>
+              <a:rPr sz="1100" b="0">
+                <a:solidFill>
+                  <a:srgbClr val="E8EDF4"/>
+                </a:solidFill>
+                <a:latin typeface="Microsoft JhengHei"/>
+                <a:ea typeface="Microsoft JhengHei"/>
+                <a:cs typeface="Microsoft JhengHei"/>
+              </a:rPr>
+              <a:t>期間</a:t>
+            </a:r>
+          </a:p>
+        </p:txBody>
+      </p:sp>
+      <p:sp>
+        <p:nvSpPr>
+          <p:cNvPr id="33" name="Rounded Rectangle 32"/>
+          <p:cNvSpPr/>
+          <p:nvPr/>
+        </p:nvSpPr>
+        <p:spPr>
+          <a:xfrm>
+            <a:off x="3529583" y="5623560"/>
+            <a:ext cx="1298448" cy="868680"/>
+          </a:xfrm>
+          <a:prstGeom prst="roundRect">
+            <a:avLst>
+              <a:gd name="adj" fmla="val 8000"/>
+            </a:avLst>
+          </a:prstGeom>
+          <a:solidFill>
+            <a:srgbClr val="1E3A5F"/>
+          </a:solidFill>
+          <a:ln>
+            <a:noFill/>
+          </a:ln>
+          <a:effectLst/>
+        </p:spPr>
+        <p:style>
+          <a:lnRef idx="1">
+            <a:schemeClr val="accent1"/>
+          </a:lnRef>
+          <a:fillRef idx="3">
+            <a:schemeClr val="accent1"/>
+          </a:fillRef>
+          <a:effectRef idx="2">
+            <a:schemeClr val="accent1"/>
+          </a:effectRef>
+          <a:fontRef idx="minor">
+            <a:schemeClr val="lt1"/>
+          </a:fontRef>
+        </p:style>
+        <p:txBody>
+          <a:bodyPr rtlCol="0" anchor="ctr"/>
+          <a:lstStyle/>
+          <a:p>
+            <a:pPr algn="ctr"/>
+          </a:p>
+        </p:txBody>
+      </p:sp>
+      <p:sp>
+        <p:nvSpPr>
+          <p:cNvPr id="34" name="TextBox 33"/>
           <p:cNvSpPr txBox="1"/>
           <p:nvPr/>
         </p:nvSpPr>
         <p:spPr>
           <a:xfrm>
-            <a:off x="640080" y="5760720"/>
-            <a:ext cx="10972800" cy="548640"/>
+            <a:off x="3529583" y="5705856"/>
+            <a:ext cx="1298448" cy="502920"/>
           </a:xfrm>
           <a:prstGeom prst="rect">
             <a:avLst/>
@@ -12615,7 +14314,7 @@
           </a:bodyPr>
           <a:lstStyle/>
           <a:p>
-            <a:pPr algn="l">
+            <a:pPr algn="ctr">
               <a:lnSpc>
                 <a:spcPct val="100000"/>
               </a:lnSpc>
@@ -12627,7 +14326,241 @@
               </a:spcAft>
             </a:pPr>
             <a:r>
-              <a:rPr sz="1350" b="0">
+              <a:rPr sz="2400" b="1">
+                <a:solidFill>
+                  <a:srgbClr val="FFFFFF"/>
+                </a:solidFill>
+                <a:latin typeface="Microsoft JhengHei"/>
+                <a:ea typeface="Microsoft JhengHei"/>
+                <a:cs typeface="Microsoft JhengHei"/>
+              </a:rPr>
+              <a:t>1,104</a:t>
+            </a:r>
+          </a:p>
+        </p:txBody>
+      </p:sp>
+      <p:sp>
+        <p:nvSpPr>
+          <p:cNvPr id="35" name="TextBox 34"/>
+          <p:cNvSpPr txBox="1"/>
+          <p:nvPr/>
+        </p:nvSpPr>
+        <p:spPr>
+          <a:xfrm>
+            <a:off x="3529583" y="6199632"/>
+            <a:ext cx="1298448" cy="274320"/>
+          </a:xfrm>
+          <a:prstGeom prst="rect">
+            <a:avLst/>
+          </a:prstGeom>
+          <a:noFill/>
+        </p:spPr>
+        <p:txBody>
+          <a:bodyPr wrap="square" anchor="t" lIns="0" rIns="0" tIns="0" bIns="0">
+            <a:spAutoFit/>
+          </a:bodyPr>
+          <a:lstStyle/>
+          <a:p>
+            <a:pPr algn="ctr">
+              <a:lnSpc>
+                <a:spcPct val="100000"/>
+              </a:lnSpc>
+              <a:spcBef>
+                <a:spcPts val="0"/>
+              </a:spcBef>
+              <a:spcAft>
+                <a:spcPts val="400"/>
+              </a:spcAft>
+            </a:pPr>
+            <a:r>
+              <a:rPr sz="1100" b="0">
+                <a:solidFill>
+                  <a:srgbClr val="E8EDF4"/>
+                </a:solidFill>
+                <a:latin typeface="Microsoft JhengHei"/>
+                <a:ea typeface="Microsoft JhengHei"/>
+                <a:cs typeface="Microsoft JhengHei"/>
+              </a:rPr>
+              <a:t>結構化指標</a:t>
+            </a:r>
+          </a:p>
+        </p:txBody>
+      </p:sp>
+      <p:sp>
+        <p:nvSpPr>
+          <p:cNvPr id="36" name="Rounded Rectangle 35"/>
+          <p:cNvSpPr/>
+          <p:nvPr/>
+        </p:nvSpPr>
+        <p:spPr>
+          <a:xfrm>
+            <a:off x="4974336" y="5623560"/>
+            <a:ext cx="1298448" cy="868680"/>
+          </a:xfrm>
+          <a:prstGeom prst="roundRect">
+            <a:avLst>
+              <a:gd name="adj" fmla="val 8000"/>
+            </a:avLst>
+          </a:prstGeom>
+          <a:solidFill>
+            <a:srgbClr val="1E3A5F"/>
+          </a:solidFill>
+          <a:ln>
+            <a:noFill/>
+          </a:ln>
+          <a:effectLst/>
+        </p:spPr>
+        <p:style>
+          <a:lnRef idx="1">
+            <a:schemeClr val="accent1"/>
+          </a:lnRef>
+          <a:fillRef idx="3">
+            <a:schemeClr val="accent1"/>
+          </a:fillRef>
+          <a:effectRef idx="2">
+            <a:schemeClr val="accent1"/>
+          </a:effectRef>
+          <a:fontRef idx="minor">
+            <a:schemeClr val="lt1"/>
+          </a:fontRef>
+        </p:style>
+        <p:txBody>
+          <a:bodyPr rtlCol="0" anchor="ctr"/>
+          <a:lstStyle/>
+          <a:p>
+            <a:pPr algn="ctr"/>
+          </a:p>
+        </p:txBody>
+      </p:sp>
+      <p:sp>
+        <p:nvSpPr>
+          <p:cNvPr id="37" name="TextBox 36"/>
+          <p:cNvSpPr txBox="1"/>
+          <p:nvPr/>
+        </p:nvSpPr>
+        <p:spPr>
+          <a:xfrm>
+            <a:off x="4974336" y="5705856"/>
+            <a:ext cx="1298448" cy="502920"/>
+          </a:xfrm>
+          <a:prstGeom prst="rect">
+            <a:avLst/>
+          </a:prstGeom>
+          <a:noFill/>
+        </p:spPr>
+        <p:txBody>
+          <a:bodyPr wrap="square" anchor="t" lIns="0" rIns="0" tIns="0" bIns="0">
+            <a:spAutoFit/>
+          </a:bodyPr>
+          <a:lstStyle/>
+          <a:p>
+            <a:pPr algn="ctr">
+              <a:lnSpc>
+                <a:spcPct val="100000"/>
+              </a:lnSpc>
+              <a:spcBef>
+                <a:spcPts val="0"/>
+              </a:spcBef>
+              <a:spcAft>
+                <a:spcPts val="400"/>
+              </a:spcAft>
+            </a:pPr>
+            <a:r>
+              <a:rPr sz="2400" b="1">
+                <a:solidFill>
+                  <a:srgbClr val="FFFFFF"/>
+                </a:solidFill>
+                <a:latin typeface="Microsoft JhengHei"/>
+                <a:ea typeface="Microsoft JhengHei"/>
+                <a:cs typeface="Microsoft JhengHei"/>
+              </a:rPr>
+              <a:t>313</a:t>
+            </a:r>
+          </a:p>
+        </p:txBody>
+      </p:sp>
+      <p:sp>
+        <p:nvSpPr>
+          <p:cNvPr id="38" name="TextBox 37"/>
+          <p:cNvSpPr txBox="1"/>
+          <p:nvPr/>
+        </p:nvSpPr>
+        <p:spPr>
+          <a:xfrm>
+            <a:off x="4974336" y="6199632"/>
+            <a:ext cx="1298448" cy="274320"/>
+          </a:xfrm>
+          <a:prstGeom prst="rect">
+            <a:avLst/>
+          </a:prstGeom>
+          <a:noFill/>
+        </p:spPr>
+        <p:txBody>
+          <a:bodyPr wrap="square" anchor="t" lIns="0" rIns="0" tIns="0" bIns="0">
+            <a:spAutoFit/>
+          </a:bodyPr>
+          <a:lstStyle/>
+          <a:p>
+            <a:pPr algn="ctr">
+              <a:lnSpc>
+                <a:spcPct val="100000"/>
+              </a:lnSpc>
+              <a:spcBef>
+                <a:spcPts val="0"/>
+              </a:spcBef>
+              <a:spcAft>
+                <a:spcPts val="400"/>
+              </a:spcAft>
+            </a:pPr>
+            <a:r>
+              <a:rPr sz="1100" b="0">
+                <a:solidFill>
+                  <a:srgbClr val="E8EDF4"/>
+                </a:solidFill>
+                <a:latin typeface="Microsoft JhengHei"/>
+                <a:ea typeface="Microsoft JhengHei"/>
+                <a:cs typeface="Microsoft JhengHei"/>
+              </a:rPr>
+              <a:t>語意段落</a:t>
+            </a:r>
+          </a:p>
+        </p:txBody>
+      </p:sp>
+      <p:sp>
+        <p:nvSpPr>
+          <p:cNvPr id="39" name="TextBox 38"/>
+          <p:cNvSpPr txBox="1"/>
+          <p:nvPr/>
+        </p:nvSpPr>
+        <p:spPr>
+          <a:xfrm>
+            <a:off x="6309360" y="5852160"/>
+            <a:ext cx="5212080" cy="548640"/>
+          </a:xfrm>
+          <a:prstGeom prst="rect">
+            <a:avLst/>
+          </a:prstGeom>
+          <a:noFill/>
+        </p:spPr>
+        <p:txBody>
+          <a:bodyPr wrap="square" anchor="t" lIns="0" rIns="0" tIns="0" bIns="0">
+            <a:spAutoFit/>
+          </a:bodyPr>
+          <a:lstStyle/>
+          <a:p>
+            <a:pPr algn="l">
+              <a:lnSpc>
+                <a:spcPct val="115000"/>
+              </a:lnSpc>
+              <a:spcBef>
+                <a:spcPts val="0"/>
+              </a:spcBef>
+              <a:spcAft>
+                <a:spcPts val="400"/>
+              </a:spcAft>
+            </a:pPr>
+            <a:r>
+              <a:rPr sz="1200" b="0">
                 <a:solidFill>
                   <a:srgbClr val="767C87"/>
                 </a:solidFill>
@@ -12635,14 +14568,14 @@
                 <a:ea typeface="Microsoft JhengHei"/>
                 <a:cs typeface="Microsoft JhengHei"/>
               </a:rPr>
-              <a:t>中信金控 · 國泰金控 · 玉山金控 · 第一金控——皆為公開資料，跨機構結構相近、最能凸顯「難以並排比較」的真實痛點。</a:t>
-            </a:r>
-          </a:p>
-        </p:txBody>
-      </p:sp>
-      <p:sp>
-        <p:nvSpPr>
-          <p:cNvPr id="30" name="TextBox 29"/>
+              <a:t>清洗重點：逐字稿切段、金額統一換算、累計指標標記、跨機構術語字典對齊。</a:t>
+            </a:r>
+          </a:p>
+        </p:txBody>
+      </p:sp>
+      <p:sp>
+        <p:nvSpPr>
+          <p:cNvPr id="40" name="TextBox 39"/>
           <p:cNvSpPr txBox="1"/>
           <p:nvPr/>
         </p:nvSpPr>
@@ -12755,7 +14688,7 @@
                 <a:ea typeface="Microsoft JhengHei"/>
                 <a:cs typeface="Microsoft JhengHei"/>
               </a:rPr>
-              <a:t>ARCHITECTURE · 技術應用深度 20%</a:t>
+              <a:t>ARCHITECTURE · 語意知識網 · 技術應用深度 20%</a:t>
             </a:r>
           </a:p>
         </p:txBody>
@@ -12802,7 +14735,7 @@
                 <a:ea typeface="Microsoft JhengHei"/>
                 <a:cs typeface="Microsoft JhengHei"/>
               </a:rPr>
-              <a:t>系統架構 — Hybrid RAG</a:t>
+              <a:t>系統技術架構 — Hybrid RAG</a:t>
             </a:r>
           </a:p>
         </p:txBody>
@@ -12849,7 +14782,7 @@
                 <a:ea typeface="Microsoft JhengHei"/>
                 <a:cs typeface="Microsoft JhengHei"/>
               </a:rPr>
-              <a:t>使用者一句話問題，雙引擎並行、AI Agent 智慧路由</a:t>
+              <a:t>語意知識網（Semantic Knowledge Network）：雙引擎並行、AI Agent 智慧路由</a:t>
             </a:r>
           </a:p>
         </p:txBody>
@@ -15625,7 +17558,7 @@
                 <a:ea typeface="Microsoft JhengHei"/>
                 <a:cs typeface="Microsoft JhengHei"/>
               </a:rPr>
-              <a:t>圖表指令解析　</a:t>
+              <a:t>中文檢索優化　</a:t>
             </a:r>
             <a:r>
               <a:rPr sz="1500">
@@ -15636,7 +17569,7 @@
                 <a:ea typeface="Microsoft JhengHei"/>
                 <a:cs typeface="Microsoft JhengHei"/>
               </a:rPr>
-              <a:t>把 EAP 的畫圖指令＋資料表變成互動圖表</a:t>
+              <a:t>發現英文 embedding 對中文不準，改用中文關鍵字混合檢索</a:t>
             </a:r>
           </a:p>
           <a:p>
@@ -15799,7 +17732,7 @@
                 <a:ea typeface="Microsoft JhengHei"/>
                 <a:cs typeface="Microsoft JhengHei"/>
               </a:rPr>
-              <a:t>DEMO ① · 介面呈現 15% / Demo 30%</a:t>
+              <a:t>QA 驗證 · 第一次諮詢重點</a:t>
             </a:r>
           </a:p>
         </p:txBody>
@@ -15846,7 +17779,7 @@
                 <a:ea typeface="Microsoft JhengHei"/>
                 <a:cs typeface="Microsoft JhengHei"/>
               </a:rPr>
-              <a:t>分析儀表板</a:t>
+              <a:t>QA 測試：檢索＋計算驗證</a:t>
             </a:r>
           </a:p>
         </p:txBody>
@@ -15859,8 +17792,8 @@
         </p:nvSpPr>
         <p:spPr>
           <a:xfrm>
-            <a:off x="640080" y="2148840"/>
-            <a:ext cx="5029200" cy="3657600"/>
+            <a:off x="640080" y="1481328"/>
+            <a:ext cx="10972800" cy="457200"/>
           </a:xfrm>
           <a:prstGeom prst="rect">
             <a:avLst/>
@@ -15868,223 +17801,32 @@
           <a:noFill/>
         </p:spPr>
         <p:txBody>
-          <a:bodyPr wrap="square" lIns="0" rIns="0" tIns="0" bIns="0">
+          <a:bodyPr wrap="square" anchor="t" lIns="0" rIns="0" tIns="0" bIns="0">
             <a:spAutoFit/>
           </a:bodyPr>
           <a:lstStyle/>
           <a:p>
-            <a:pPr>
-              <a:lnSpc>
-                <a:spcPct val="115000"/>
-              </a:lnSpc>
-              <a:spcAft>
-                <a:spcPts val="1400"/>
-              </a:spcAft>
-            </a:pPr>
-            <a:r>
-              <a:rPr sz="1350" b="1">
-                <a:solidFill>
-                  <a:srgbClr val="6B4E9E"/>
-                </a:solidFill>
-                <a:latin typeface="Microsoft JhengHei"/>
-                <a:ea typeface="Microsoft JhengHei"/>
-                <a:cs typeface="Microsoft JhengHei"/>
-              </a:rPr>
-              <a:t>●  </a:t>
-            </a:r>
-            <a:r>
-              <a:rPr sz="1550" b="1">
-                <a:solidFill>
-                  <a:srgbClr val="1E3A5F"/>
-                </a:solidFill>
-                <a:latin typeface="Microsoft JhengHei"/>
-                <a:ea typeface="Microsoft JhengHei"/>
-                <a:cs typeface="Microsoft JhengHei"/>
-              </a:rPr>
-              <a:t>核心指標卡　</a:t>
-            </a:r>
-            <a:r>
-              <a:rPr sz="1550">
-                <a:solidFill>
-                  <a:srgbClr val="434343"/>
-                </a:solidFill>
-                <a:latin typeface="Microsoft JhengHei"/>
-                <a:ea typeface="Microsoft JhengHei"/>
-                <a:cs typeface="Microsoft JhengHei"/>
-              </a:rPr>
-              <a:t>金控門面數字加大加粗，投影機也看得清</a:t>
-            </a:r>
-          </a:p>
-          <a:p>
-            <a:pPr>
-              <a:lnSpc>
-                <a:spcPct val="115000"/>
-              </a:lnSpc>
-              <a:spcAft>
-                <a:spcPts val="1400"/>
-              </a:spcAft>
-            </a:pPr>
-            <a:r>
-              <a:rPr sz="1350" b="1">
-                <a:solidFill>
-                  <a:srgbClr val="6B4E9E"/>
-                </a:solidFill>
-                <a:latin typeface="Microsoft JhengHei"/>
-                <a:ea typeface="Microsoft JhengHei"/>
-                <a:cs typeface="Microsoft JhengHei"/>
-              </a:rPr>
-              <a:t>●  </a:t>
-            </a:r>
-            <a:r>
-              <a:rPr sz="1550" b="1">
-                <a:solidFill>
-                  <a:srgbClr val="1E3A5F"/>
-                </a:solidFill>
-                <a:latin typeface="Microsoft JhengHei"/>
-                <a:ea typeface="Microsoft JhengHei"/>
-                <a:cs typeface="Microsoft JhengHei"/>
-              </a:rPr>
-              <a:t>依財務意義分組　</a:t>
-            </a:r>
-            <a:r>
-              <a:rPr sz="1550">
-                <a:solidFill>
-                  <a:srgbClr val="434343"/>
-                </a:solidFill>
-                <a:latin typeface="Microsoft JhengHei"/>
-                <a:ea typeface="Microsoft JhengHei"/>
-                <a:cs typeface="Microsoft JhengHei"/>
-              </a:rPr>
-              <a:t>獲利／資本／資產品質…照邏輯瀏覽</a:t>
-            </a:r>
-          </a:p>
-          <a:p>
-            <a:pPr>
-              <a:lnSpc>
-                <a:spcPct val="115000"/>
-              </a:lnSpc>
-              <a:spcAft>
-                <a:spcPts val="1400"/>
-              </a:spcAft>
-            </a:pPr>
-            <a:r>
-              <a:rPr sz="1350" b="1">
-                <a:solidFill>
-                  <a:srgbClr val="6B4E9E"/>
-                </a:solidFill>
-                <a:latin typeface="Microsoft JhengHei"/>
-                <a:ea typeface="Microsoft JhengHei"/>
-                <a:cs typeface="Microsoft JhengHei"/>
-              </a:rPr>
-              <a:t>●  </a:t>
-            </a:r>
-            <a:r>
-              <a:rPr sz="1550" b="1">
-                <a:solidFill>
-                  <a:srgbClr val="1E3A5F"/>
-                </a:solidFill>
-                <a:latin typeface="Microsoft JhengHei"/>
-                <a:ea typeface="Microsoft JhengHei"/>
-                <a:cs typeface="Microsoft JhengHei"/>
-              </a:rPr>
-              <a:t>懸停看趨勢　</a:t>
-            </a:r>
-            <a:r>
-              <a:rPr sz="1550">
-                <a:solidFill>
-                  <a:srgbClr val="434343"/>
-                </a:solidFill>
-                <a:latin typeface="Microsoft JhengHei"/>
-                <a:ea typeface="Microsoft JhengHei"/>
-                <a:cs typeface="Microsoft JhengHei"/>
-              </a:rPr>
-              <a:t>滑過卡片顯示六期 sparkline 走勢</a:t>
-            </a:r>
-          </a:p>
-          <a:p>
-            <a:pPr>
-              <a:lnSpc>
-                <a:spcPct val="115000"/>
-              </a:lnSpc>
-              <a:spcAft>
-                <a:spcPts val="1400"/>
-              </a:spcAft>
-            </a:pPr>
-            <a:r>
-              <a:rPr sz="1350" b="1">
-                <a:solidFill>
-                  <a:srgbClr val="6B4E9E"/>
-                </a:solidFill>
-                <a:latin typeface="Microsoft JhengHei"/>
-                <a:ea typeface="Microsoft JhengHei"/>
-                <a:cs typeface="Microsoft JhengHei"/>
-              </a:rPr>
-              <a:t>●  </a:t>
-            </a:r>
-            <a:r>
-              <a:rPr sz="1550" b="1">
-                <a:solidFill>
-                  <a:srgbClr val="1E3A5F"/>
-                </a:solidFill>
-                <a:latin typeface="Microsoft JhengHei"/>
-                <a:ea typeface="Microsoft JhengHei"/>
-                <a:cs typeface="Microsoft JhengHei"/>
-              </a:rPr>
-              <a:t>AI 觀點總結　</a:t>
-            </a:r>
-            <a:r>
-              <a:rPr sz="1550">
-                <a:solidFill>
-                  <a:srgbClr val="434343"/>
-                </a:solidFill>
-                <a:latin typeface="Microsoft JhengHei"/>
-                <a:ea typeface="Microsoft JhengHei"/>
-                <a:cs typeface="Microsoft JhengHei"/>
-              </a:rPr>
-              <a:t>一鍵讓 AI 讀完本期數字給一句話結論</a:t>
-            </a:r>
-          </a:p>
-          <a:p>
-            <a:pPr>
-              <a:lnSpc>
-                <a:spcPct val="115000"/>
-              </a:lnSpc>
-              <a:spcAft>
-                <a:spcPts val="1400"/>
-              </a:spcAft>
-            </a:pPr>
-            <a:r>
-              <a:rPr sz="1350" b="1">
-                <a:solidFill>
-                  <a:srgbClr val="6B4E9E"/>
-                </a:solidFill>
-                <a:latin typeface="Microsoft JhengHei"/>
-                <a:ea typeface="Microsoft JhengHei"/>
-                <a:cs typeface="Microsoft JhengHei"/>
-              </a:rPr>
-              <a:t>●  </a:t>
-            </a:r>
-            <a:r>
-              <a:rPr sz="1550" b="1">
-                <a:solidFill>
-                  <a:srgbClr val="1E3A5F"/>
-                </a:solidFill>
-                <a:latin typeface="Microsoft JhengHei"/>
-                <a:ea typeface="Microsoft JhengHei"/>
-                <a:cs typeface="Microsoft JhengHei"/>
-              </a:rPr>
-              <a:t>術語 tooltip　</a:t>
-            </a:r>
-            <a:r>
-              <a:rPr sz="1550">
-                <a:solidFill>
-                  <a:srgbClr val="434343"/>
-                </a:solidFill>
-                <a:latin typeface="Microsoft JhengHei"/>
-                <a:ea typeface="Microsoft JhengHei"/>
-                <a:cs typeface="Microsoft JhengHei"/>
-              </a:rPr>
-              <a:t>ROE／NIM 滑上去看白話定義</a:t>
+            <a:pPr algn="l">
+              <a:lnSpc>
+                <a:spcPct val="100000"/>
+              </a:lnSpc>
+              <a:spcBef>
+                <a:spcPts val="0"/>
+              </a:spcBef>
+              <a:spcAft>
+                <a:spcPts val="400"/>
+              </a:spcAft>
+            </a:pPr>
+            <a:r>
+              <a:rPr sz="1500" b="0">
+                <a:solidFill>
+                  <a:srgbClr val="767C87"/>
+                </a:solidFill>
+                <a:latin typeface="Microsoft JhengHei"/>
+                <a:ea typeface="Microsoft JhengHei"/>
+                <a:cs typeface="Microsoft JhengHei"/>
+              </a:rPr>
+              <a:t>把冷數據變成可信的溫決策——數字可驗證、說法有出處</a:t>
             </a:r>
           </a:p>
         </p:txBody>
@@ -16097,8 +17839,8 @@
         </p:nvSpPr>
         <p:spPr>
           <a:xfrm>
-            <a:off x="5943600" y="1965960"/>
-            <a:ext cx="5605272" cy="3977639"/>
+            <a:off x="640080" y="2011680"/>
+            <a:ext cx="5394960" cy="3794760"/>
           </a:xfrm>
           <a:prstGeom prst="roundRect">
             <a:avLst>
@@ -16106,9 +17848,9 @@
             </a:avLst>
           </a:prstGeom>
           <a:solidFill>
-            <a:srgbClr val="FFFFFF"/>
+            <a:srgbClr val="F7F9FB"/>
           </a:solidFill>
-          <a:ln w="15240">
+          <a:ln w="12700">
             <a:solidFill>
               <a:srgbClr val="D8DEE6"/>
             </a:solidFill>
@@ -16139,17 +17881,66 @@
       </p:sp>
       <p:sp>
         <p:nvSpPr>
-          <p:cNvPr id="6" name="Rectangle 5"/>
+          <p:cNvPr id="6" name="TextBox 5"/>
+          <p:cNvSpPr txBox="1"/>
+          <p:nvPr/>
+        </p:nvSpPr>
+        <p:spPr>
+          <a:xfrm>
+            <a:off x="914400" y="2240280"/>
+            <a:ext cx="4846320" cy="457200"/>
+          </a:xfrm>
+          <a:prstGeom prst="rect">
+            <a:avLst/>
+          </a:prstGeom>
+          <a:noFill/>
+        </p:spPr>
+        <p:txBody>
+          <a:bodyPr wrap="square" anchor="t" lIns="0" rIns="0" tIns="0" bIns="0">
+            <a:spAutoFit/>
+          </a:bodyPr>
+          <a:lstStyle/>
+          <a:p>
+            <a:pPr algn="l">
+              <a:lnSpc>
+                <a:spcPct val="100000"/>
+              </a:lnSpc>
+              <a:spcBef>
+                <a:spcPts val="0"/>
+              </a:spcBef>
+              <a:spcAft>
+                <a:spcPts val="400"/>
+              </a:spcAft>
+            </a:pPr>
+            <a:r>
+              <a:rPr sz="1600" b="1">
+                <a:solidFill>
+                  <a:srgbClr val="1E3A5F"/>
+                </a:solidFill>
+                <a:latin typeface="Microsoft JhengHei"/>
+                <a:ea typeface="Microsoft JhengHei"/>
+                <a:cs typeface="Microsoft JhengHei"/>
+              </a:rPr>
+              <a:t>① 計算驗證（Graph RAG）</a:t>
+            </a:r>
+          </a:p>
+        </p:txBody>
+      </p:sp>
+      <p:sp>
+        <p:nvSpPr>
+          <p:cNvPr id="7" name="Rounded Rectangle 6"/>
           <p:cNvSpPr/>
           <p:nvPr/>
         </p:nvSpPr>
         <p:spPr>
           <a:xfrm>
-            <a:off x="5943600" y="1965960"/>
-            <a:ext cx="5605272" cy="457200"/>
-          </a:xfrm>
-          <a:prstGeom prst="rect">
-            <a:avLst/>
+            <a:off x="914400" y="2743200"/>
+            <a:ext cx="4846320" cy="640080"/>
+          </a:xfrm>
+          <a:prstGeom prst="roundRect">
+            <a:avLst>
+              <a:gd name="adj" fmla="val 8000"/>
+            </a:avLst>
           </a:prstGeom>
           <a:solidFill>
             <a:srgbClr val="1E3A5F"/>
@@ -16183,20 +17974,341 @@
       </p:sp>
       <p:sp>
         <p:nvSpPr>
-          <p:cNvPr id="7" name="Oval 6"/>
+          <p:cNvPr id="8" name="TextBox 7"/>
+          <p:cNvSpPr txBox="1"/>
+          <p:nvPr/>
+        </p:nvSpPr>
+        <p:spPr>
+          <a:xfrm>
+            <a:off x="1097280" y="2834640"/>
+            <a:ext cx="4480560" cy="457200"/>
+          </a:xfrm>
+          <a:prstGeom prst="rect">
+            <a:avLst/>
+          </a:prstGeom>
+          <a:noFill/>
+        </p:spPr>
+        <p:txBody>
+          <a:bodyPr wrap="square" anchor="ctr" lIns="0" rIns="0" tIns="0" bIns="0">
+            <a:spAutoFit/>
+          </a:bodyPr>
+          <a:lstStyle/>
+          <a:p>
+            <a:pPr algn="l">
+              <a:lnSpc>
+                <a:spcPct val="100000"/>
+              </a:lnSpc>
+              <a:spcBef>
+                <a:spcPts val="0"/>
+              </a:spcBef>
+              <a:spcAft>
+                <a:spcPts val="400"/>
+              </a:spcAft>
+            </a:pPr>
+            <a:r>
+              <a:rPr sz="1350" b="1">
+                <a:solidFill>
+                  <a:srgbClr val="FFFFFF"/>
+                </a:solidFill>
+                <a:latin typeface="Microsoft JhengHei"/>
+                <a:ea typeface="Microsoft JhengHei"/>
+                <a:cs typeface="Microsoft JhengHei"/>
+              </a:rPr>
+              <a:t>Q：中信金控的 ROE 是多少？</a:t>
+            </a:r>
+          </a:p>
+        </p:txBody>
+      </p:sp>
+      <p:sp>
+        <p:nvSpPr>
+          <p:cNvPr id="9" name="TextBox 8"/>
+          <p:cNvSpPr txBox="1"/>
+          <p:nvPr/>
+        </p:nvSpPr>
+        <p:spPr>
+          <a:xfrm>
+            <a:off x="914400" y="3520440"/>
+            <a:ext cx="4846320" cy="822960"/>
+          </a:xfrm>
+          <a:prstGeom prst="rect">
+            <a:avLst/>
+          </a:prstGeom>
+          <a:noFill/>
+        </p:spPr>
+        <p:txBody>
+          <a:bodyPr wrap="square" anchor="t" lIns="0" rIns="0" tIns="0" bIns="0">
+            <a:spAutoFit/>
+          </a:bodyPr>
+          <a:lstStyle/>
+          <a:p>
+            <a:pPr algn="l">
+              <a:lnSpc>
+                <a:spcPct val="120000"/>
+              </a:lnSpc>
+              <a:spcBef>
+                <a:spcPts val="0"/>
+              </a:spcBef>
+              <a:spcAft>
+                <a:spcPts val="400"/>
+              </a:spcAft>
+            </a:pPr>
+            <a:r>
+              <a:rPr sz="1350" b="0">
+                <a:solidFill>
+                  <a:srgbClr val="434343"/>
+                </a:solidFill>
+                <a:latin typeface="Microsoft JhengHei"/>
+                <a:ea typeface="Microsoft JhengHei"/>
+                <a:cs typeface="Microsoft JhengHei"/>
+              </a:rPr>
+              <a:t>A：股東權益報酬率 = </a:t>
+            </a:r>
+            <a:r>
+              <a:rPr sz="1500" b="1">
+                <a:solidFill>
+                  <a:srgbClr val="1E3A5F"/>
+                </a:solidFill>
+                <a:latin typeface="Microsoft JhengHei"/>
+                <a:ea typeface="Microsoft JhengHei"/>
+                <a:cs typeface="Microsoft JhengHei"/>
+              </a:rPr>
+              <a:t>18.32%</a:t>
+            </a:r>
+          </a:p>
+        </p:txBody>
+      </p:sp>
+      <p:sp>
+        <p:nvSpPr>
+          <p:cNvPr id="10" name="Rounded Rectangle 9"/>
           <p:cNvSpPr/>
           <p:nvPr/>
         </p:nvSpPr>
         <p:spPr>
           <a:xfrm>
-            <a:off x="6144768" y="2121408"/>
-            <a:ext cx="146304" cy="146304"/>
-          </a:xfrm>
-          <a:prstGeom prst="ellipse">
-            <a:avLst/>
+            <a:off x="914400" y="4297680"/>
+            <a:ext cx="4846320" cy="1188720"/>
+          </a:xfrm>
+          <a:prstGeom prst="roundRect">
+            <a:avLst>
+              <a:gd name="adj" fmla="val 8000"/>
+            </a:avLst>
           </a:prstGeom>
           <a:solidFill>
-            <a:srgbClr val="C0392B"/>
+            <a:srgbClr val="EAF6EF"/>
+          </a:solidFill>
+          <a:ln w="12700">
+            <a:solidFill>
+              <a:srgbClr val="C6E4D3"/>
+            </a:solidFill>
+          </a:ln>
+          <a:effectLst/>
+        </p:spPr>
+        <p:style>
+          <a:lnRef idx="1">
+            <a:schemeClr val="accent1"/>
+          </a:lnRef>
+          <a:fillRef idx="3">
+            <a:schemeClr val="accent1"/>
+          </a:fillRef>
+          <a:effectRef idx="2">
+            <a:schemeClr val="accent1"/>
+          </a:effectRef>
+          <a:fontRef idx="minor">
+            <a:schemeClr val="lt1"/>
+          </a:fontRef>
+        </p:style>
+        <p:txBody>
+          <a:bodyPr rtlCol="0" anchor="ctr"/>
+          <a:lstStyle/>
+          <a:p>
+            <a:pPr algn="ctr"/>
+          </a:p>
+        </p:txBody>
+      </p:sp>
+      <p:sp>
+        <p:nvSpPr>
+          <p:cNvPr id="11" name="TextBox 10"/>
+          <p:cNvSpPr txBox="1"/>
+          <p:nvPr/>
+        </p:nvSpPr>
+        <p:spPr>
+          <a:xfrm>
+            <a:off x="1097280" y="4434840"/>
+            <a:ext cx="4480560" cy="1005840"/>
+          </a:xfrm>
+          <a:prstGeom prst="rect">
+            <a:avLst/>
+          </a:prstGeom>
+          <a:noFill/>
+        </p:spPr>
+        <p:txBody>
+          <a:bodyPr wrap="square" anchor="t" lIns="0" rIns="0" tIns="0" bIns="0">
+            <a:spAutoFit/>
+          </a:bodyPr>
+          <a:lstStyle/>
+          <a:p>
+            <a:pPr algn="l">
+              <a:lnSpc>
+                <a:spcPct val="115000"/>
+              </a:lnSpc>
+              <a:spcBef>
+                <a:spcPts val="0"/>
+              </a:spcBef>
+              <a:spcAft>
+                <a:spcPts val="300"/>
+              </a:spcAft>
+            </a:pPr>
+            <a:r>
+              <a:rPr sz="1250" b="1">
+                <a:solidFill>
+                  <a:srgbClr val="2E7D46"/>
+                </a:solidFill>
+                <a:latin typeface="Microsoft JhengHei"/>
+                <a:ea typeface="Microsoft JhengHei"/>
+                <a:cs typeface="Microsoft JhengHei"/>
+              </a:rPr>
+              <a:t>✓ 公式驗證：以自有資本 ÷ 股東權益計算，</a:t>
+            </a:r>
+          </a:p>
+          <a:p>
+            <a:pPr algn="l">
+              <a:lnSpc>
+                <a:spcPct val="115000"/>
+              </a:lnSpc>
+              <a:spcBef>
+                <a:spcPts val="0"/>
+              </a:spcBef>
+              <a:spcAft>
+                <a:spcPts val="300"/>
+              </a:spcAft>
+            </a:pPr>
+            <a:r>
+              <a:rPr sz="1250" b="0">
+                <a:solidFill>
+                  <a:srgbClr val="434343"/>
+                </a:solidFill>
+                <a:latin typeface="Microsoft JhengHei"/>
+                <a:ea typeface="Microsoft JhengHei"/>
+                <a:cs typeface="Microsoft JhengHei"/>
+              </a:rPr>
+              <a:t>非 LLM 生成，可信、可稽核。</a:t>
+            </a:r>
+          </a:p>
+        </p:txBody>
+      </p:sp>
+      <p:sp>
+        <p:nvSpPr>
+          <p:cNvPr id="12" name="Rounded Rectangle 11"/>
+          <p:cNvSpPr/>
+          <p:nvPr/>
+        </p:nvSpPr>
+        <p:spPr>
+          <a:xfrm>
+            <a:off x="6172200" y="2011680"/>
+            <a:ext cx="5376672" cy="3794760"/>
+          </a:xfrm>
+          <a:prstGeom prst="roundRect">
+            <a:avLst>
+              <a:gd name="adj" fmla="val 8000"/>
+            </a:avLst>
+          </a:prstGeom>
+          <a:solidFill>
+            <a:srgbClr val="F7F9FB"/>
+          </a:solidFill>
+          <a:ln w="12700">
+            <a:solidFill>
+              <a:srgbClr val="D8DEE6"/>
+            </a:solidFill>
+          </a:ln>
+          <a:effectLst/>
+        </p:spPr>
+        <p:style>
+          <a:lnRef idx="1">
+            <a:schemeClr val="accent1"/>
+          </a:lnRef>
+          <a:fillRef idx="3">
+            <a:schemeClr val="accent1"/>
+          </a:fillRef>
+          <a:effectRef idx="2">
+            <a:schemeClr val="accent1"/>
+          </a:effectRef>
+          <a:fontRef idx="minor">
+            <a:schemeClr val="lt1"/>
+          </a:fontRef>
+        </p:style>
+        <p:txBody>
+          <a:bodyPr rtlCol="0" anchor="ctr"/>
+          <a:lstStyle/>
+          <a:p>
+            <a:pPr algn="ctr"/>
+          </a:p>
+        </p:txBody>
+      </p:sp>
+      <p:sp>
+        <p:nvSpPr>
+          <p:cNvPr id="13" name="TextBox 12"/>
+          <p:cNvSpPr txBox="1"/>
+          <p:nvPr/>
+        </p:nvSpPr>
+        <p:spPr>
+          <a:xfrm>
+            <a:off x="6446520" y="2240280"/>
+            <a:ext cx="4846320" cy="457200"/>
+          </a:xfrm>
+          <a:prstGeom prst="rect">
+            <a:avLst/>
+          </a:prstGeom>
+          <a:noFill/>
+        </p:spPr>
+        <p:txBody>
+          <a:bodyPr wrap="square" anchor="t" lIns="0" rIns="0" tIns="0" bIns="0">
+            <a:spAutoFit/>
+          </a:bodyPr>
+          <a:lstStyle/>
+          <a:p>
+            <a:pPr algn="l">
+              <a:lnSpc>
+                <a:spcPct val="100000"/>
+              </a:lnSpc>
+              <a:spcBef>
+                <a:spcPts val="0"/>
+              </a:spcBef>
+              <a:spcAft>
+                <a:spcPts val="400"/>
+              </a:spcAft>
+            </a:pPr>
+            <a:r>
+              <a:rPr sz="1600" b="1">
+                <a:solidFill>
+                  <a:srgbClr val="6B4E9E"/>
+                </a:solidFill>
+                <a:latin typeface="Microsoft JhengHei"/>
+                <a:ea typeface="Microsoft JhengHei"/>
+                <a:cs typeface="Microsoft JhengHei"/>
+              </a:rPr>
+              <a:t>② 檢索驗證（Vector RAG）</a:t>
+            </a:r>
+          </a:p>
+        </p:txBody>
+      </p:sp>
+      <p:sp>
+        <p:nvSpPr>
+          <p:cNvPr id="14" name="Rounded Rectangle 13"/>
+          <p:cNvSpPr/>
+          <p:nvPr/>
+        </p:nvSpPr>
+        <p:spPr>
+          <a:xfrm>
+            <a:off x="6446520" y="2743200"/>
+            <a:ext cx="4828032" cy="640080"/>
+          </a:xfrm>
+          <a:prstGeom prst="roundRect">
+            <a:avLst>
+              <a:gd name="adj" fmla="val 8000"/>
+            </a:avLst>
+          </a:prstGeom>
+          <a:solidFill>
+            <a:srgbClr val="6B4E9E"/>
           </a:solidFill>
           <a:ln>
             <a:noFill/>
@@ -16227,23 +18339,121 @@
       </p:sp>
       <p:sp>
         <p:nvSpPr>
-          <p:cNvPr id="8" name="Oval 7"/>
+          <p:cNvPr id="15" name="TextBox 14"/>
+          <p:cNvSpPr txBox="1"/>
+          <p:nvPr/>
+        </p:nvSpPr>
+        <p:spPr>
+          <a:xfrm>
+            <a:off x="6629400" y="2834640"/>
+            <a:ext cx="4480560" cy="457200"/>
+          </a:xfrm>
+          <a:prstGeom prst="rect">
+            <a:avLst/>
+          </a:prstGeom>
+          <a:noFill/>
+        </p:spPr>
+        <p:txBody>
+          <a:bodyPr wrap="square" anchor="ctr" lIns="0" rIns="0" tIns="0" bIns="0">
+            <a:spAutoFit/>
+          </a:bodyPr>
+          <a:lstStyle/>
+          <a:p>
+            <a:pPr algn="l">
+              <a:lnSpc>
+                <a:spcPct val="100000"/>
+              </a:lnSpc>
+              <a:spcBef>
+                <a:spcPts val="0"/>
+              </a:spcBef>
+              <a:spcAft>
+                <a:spcPts val="400"/>
+              </a:spcAft>
+            </a:pPr>
+            <a:r>
+              <a:rPr sz="1350" b="1">
+                <a:solidFill>
+                  <a:srgbClr val="FFFFFF"/>
+                </a:solidFill>
+                <a:latin typeface="Microsoft JhengHei"/>
+                <a:ea typeface="Microsoft JhengHei"/>
+                <a:cs typeface="Microsoft JhengHei"/>
+              </a:rPr>
+              <a:t>Q：中信 2025Q2 的發債計畫？</a:t>
+            </a:r>
+          </a:p>
+        </p:txBody>
+      </p:sp>
+      <p:sp>
+        <p:nvSpPr>
+          <p:cNvPr id="16" name="TextBox 15"/>
+          <p:cNvSpPr txBox="1"/>
+          <p:nvPr/>
+        </p:nvSpPr>
+        <p:spPr>
+          <a:xfrm>
+            <a:off x="6446520" y="3520440"/>
+            <a:ext cx="4846320" cy="1005840"/>
+          </a:xfrm>
+          <a:prstGeom prst="rect">
+            <a:avLst/>
+          </a:prstGeom>
+          <a:noFill/>
+        </p:spPr>
+        <p:txBody>
+          <a:bodyPr wrap="square" anchor="t" lIns="0" rIns="0" tIns="0" bIns="0">
+            <a:spAutoFit/>
+          </a:bodyPr>
+          <a:lstStyle/>
+          <a:p>
+            <a:pPr algn="l">
+              <a:lnSpc>
+                <a:spcPct val="120000"/>
+              </a:lnSpc>
+              <a:spcBef>
+                <a:spcPts val="0"/>
+              </a:spcBef>
+              <a:spcAft>
+                <a:spcPts val="400"/>
+              </a:spcAft>
+            </a:pPr>
+            <a:r>
+              <a:rPr sz="1300" b="0">
+                <a:solidFill>
+                  <a:srgbClr val="434343"/>
+                </a:solidFill>
+                <a:latin typeface="Microsoft JhengHei"/>
+                <a:ea typeface="Microsoft JhengHei"/>
+                <a:cs typeface="Microsoft JhengHei"/>
+              </a:rPr>
+              <a:t>A：各子公司（金控／銀行／保險）均向董事會申請發債額度，依市場狀況分批發行。</a:t>
+            </a:r>
+          </a:p>
+        </p:txBody>
+      </p:sp>
+      <p:sp>
+        <p:nvSpPr>
+          <p:cNvPr id="17" name="Rounded Rectangle 16"/>
           <p:cNvSpPr/>
           <p:nvPr/>
         </p:nvSpPr>
         <p:spPr>
           <a:xfrm>
-            <a:off x="6400800" y="2121408"/>
-            <a:ext cx="146304" cy="146304"/>
-          </a:xfrm>
-          <a:prstGeom prst="ellipse">
-            <a:avLst/>
+            <a:off x="6446520" y="4709160"/>
+            <a:ext cx="4828032" cy="777240"/>
+          </a:xfrm>
+          <a:prstGeom prst="roundRect">
+            <a:avLst>
+              <a:gd name="adj" fmla="val 8000"/>
+            </a:avLst>
           </a:prstGeom>
           <a:solidFill>
-            <a:srgbClr val="F5C142"/>
+            <a:srgbClr val="FFFFFF"/>
           </a:solidFill>
-          <a:ln>
-            <a:noFill/>
+          <a:ln w="12700">
+            <a:solidFill>
+              <a:srgbClr val="E1E4E8"/>
+            </a:solidFill>
           </a:ln>
           <a:effectLst/>
         </p:spPr>
@@ -16271,58 +18481,14 @@
       </p:sp>
       <p:sp>
         <p:nvSpPr>
-          <p:cNvPr id="9" name="Oval 8"/>
-          <p:cNvSpPr/>
-          <p:nvPr/>
-        </p:nvSpPr>
-        <p:spPr>
-          <a:xfrm>
-            <a:off x="6656831" y="2121408"/>
-            <a:ext cx="146304" cy="146304"/>
-          </a:xfrm>
-          <a:prstGeom prst="ellipse">
-            <a:avLst/>
-          </a:prstGeom>
-          <a:solidFill>
-            <a:srgbClr val="2E7D46"/>
-          </a:solidFill>
-          <a:ln>
-            <a:noFill/>
-          </a:ln>
-          <a:effectLst/>
-        </p:spPr>
-        <p:style>
-          <a:lnRef idx="1">
-            <a:schemeClr val="accent1"/>
-          </a:lnRef>
-          <a:fillRef idx="3">
-            <a:schemeClr val="accent1"/>
-          </a:fillRef>
-          <a:effectRef idx="2">
-            <a:schemeClr val="accent1"/>
-          </a:effectRef>
-          <a:fontRef idx="minor">
-            <a:schemeClr val="lt1"/>
-          </a:fontRef>
-        </p:style>
-        <p:txBody>
-          <a:bodyPr rtlCol="0" anchor="ctr"/>
-          <a:lstStyle/>
-          <a:p>
-            <a:pPr algn="ctr"/>
-          </a:p>
-        </p:txBody>
-      </p:sp>
-      <p:sp>
-        <p:nvSpPr>
-          <p:cNvPr id="10" name="TextBox 9"/>
+          <p:cNvPr id="18" name="TextBox 17"/>
           <p:cNvSpPr txBox="1"/>
           <p:nvPr/>
         </p:nvSpPr>
         <p:spPr>
           <a:xfrm>
-            <a:off x="7040880" y="2039112"/>
-            <a:ext cx="4325112" cy="320040"/>
+            <a:off x="6629400" y="4800600"/>
+            <a:ext cx="4480560" cy="640080"/>
           </a:xfrm>
           <a:prstGeom prst="rect">
             <a:avLst/>
@@ -16330,95 +18496,48 @@
           <a:noFill/>
         </p:spPr>
         <p:txBody>
-          <a:bodyPr wrap="square" anchor="ctr" lIns="0" rIns="0" tIns="0" bIns="0">
+          <a:bodyPr wrap="square" anchor="t" lIns="0" rIns="0" tIns="0" bIns="0">
             <a:spAutoFit/>
           </a:bodyPr>
           <a:lstStyle/>
           <a:p>
             <a:pPr algn="l">
               <a:lnSpc>
-                <a:spcPct val="100000"/>
+                <a:spcPct val="110000"/>
               </a:lnSpc>
               <a:spcBef>
                 <a:spcPts val="0"/>
               </a:spcBef>
               <a:spcAft>
-                <a:spcPts val="400"/>
-              </a:spcAft>
-            </a:pPr>
-            <a:r>
-              <a:rPr sz="1150" b="1">
-                <a:solidFill>
-                  <a:srgbClr val="FFFFFF"/>
-                </a:solidFill>
-                <a:latin typeface="Microsoft JhengHei"/>
-                <a:ea typeface="Microsoft JhengHei"/>
-                <a:cs typeface="Microsoft JhengHei"/>
-              </a:rPr>
-              <a:t>有你蒸好 · 財報分析</a:t>
-            </a:r>
-          </a:p>
-        </p:txBody>
-      </p:sp>
-      <p:sp>
-        <p:nvSpPr>
-          <p:cNvPr id="11" name="TextBox 10"/>
-          <p:cNvSpPr txBox="1"/>
-          <p:nvPr/>
-        </p:nvSpPr>
-        <p:spPr>
-          <a:xfrm>
-            <a:off x="6309360" y="3337560"/>
-            <a:ext cx="4873752" cy="1280160"/>
-          </a:xfrm>
-          <a:prstGeom prst="rect">
-            <a:avLst/>
-          </a:prstGeom>
-          <a:noFill/>
-        </p:spPr>
-        <p:txBody>
-          <a:bodyPr wrap="square" anchor="ctr" lIns="0" rIns="0" tIns="0" bIns="0">
-            <a:spAutoFit/>
-          </a:bodyPr>
-          <a:lstStyle/>
-          <a:p>
-            <a:pPr algn="ctr">
-              <a:lnSpc>
-                <a:spcPct val="100000"/>
+                <a:spcPts val="200"/>
+              </a:spcAft>
+            </a:pPr>
+            <a:r>
+              <a:rPr sz="1200" b="1">
+                <a:solidFill>
+                  <a:srgbClr val="6B4E9E"/>
+                </a:solidFill>
+                <a:latin typeface="Microsoft JhengHei"/>
+                <a:ea typeface="Microsoft JhengHei"/>
+                <a:cs typeface="Microsoft JhengHei"/>
+              </a:rPr>
+              <a:t>📄 來源：中信金控 2025Q2 法說會錄音 #4</a:t>
+            </a:r>
+          </a:p>
+          <a:p>
+            <a:pPr algn="l">
+              <a:lnSpc>
+                <a:spcPct val="110000"/>
               </a:lnSpc>
               <a:spcBef>
                 <a:spcPts val="0"/>
               </a:spcBef>
               <a:spcAft>
-                <a:spcPts val="800"/>
-              </a:spcAft>
-            </a:pPr>
-            <a:r>
-              <a:rPr sz="1500" b="1">
-                <a:solidFill>
-                  <a:srgbClr val="1E3A5F"/>
-                </a:solidFill>
-                <a:latin typeface="Microsoft JhengHei"/>
-                <a:ea typeface="Microsoft JhengHei"/>
-                <a:cs typeface="Microsoft JhengHei"/>
-              </a:rPr>
-              <a:t>分析儀表板</a:t>
-            </a:r>
-          </a:p>
-          <a:p>
-            <a:pPr algn="ctr">
-              <a:lnSpc>
-                <a:spcPct val="100000"/>
-              </a:lnSpc>
-              <a:spcBef>
-                <a:spcPts val="0"/>
-              </a:spcBef>
-              <a:spcAft>
-                <a:spcPts val="800"/>
-              </a:spcAft>
-            </a:pPr>
-            <a:r>
-              <a:rPr sz="1250" b="0">
+                <a:spcPts val="200"/>
+              </a:spcAft>
+            </a:pPr>
+            <a:r>
+              <a:rPr sz="1150" b="0">
                 <a:solidFill>
                   <a:srgbClr val="767C87"/>
                 </a:solidFill>
@@ -16426,14 +18545,14 @@
                 <a:ea typeface="Microsoft JhengHei"/>
                 <a:cs typeface="Microsoft JhengHei"/>
               </a:rPr>
-              <a:t>（此處貼上實機操作截圖，或現場 Demo）</a:t>
-            </a:r>
-          </a:p>
-        </p:txBody>
-      </p:sp>
-      <p:sp>
-        <p:nvSpPr>
-          <p:cNvPr id="12" name="TextBox 11"/>
+              <a:t>每則答案都附出處頁，可回溯查證。</a:t>
+            </a:r>
+          </a:p>
+        </p:txBody>
+      </p:sp>
+      <p:sp>
+        <p:nvSpPr>
+          <p:cNvPr id="19" name="TextBox 18"/>
           <p:cNvSpPr txBox="1"/>
           <p:nvPr/>
         </p:nvSpPr>
